--- a/Block B/Final Presentation.pptx
+++ b/Block B/Final Presentation.pptx
@@ -10,10 +10,9 @@
     <p:sldId id="257" r:id="rId4"/>
     <p:sldId id="258" r:id="rId5"/>
     <p:sldId id="264" r:id="rId6"/>
-    <p:sldId id="265" r:id="rId7"/>
-    <p:sldId id="266" r:id="rId8"/>
-    <p:sldId id="262" r:id="rId9"/>
-    <p:sldId id="267" r:id="rId10"/>
+    <p:sldId id="266" r:id="rId7"/>
+    <p:sldId id="262" r:id="rId8"/>
+    <p:sldId id="267" r:id="rId9"/>
   </p:sldIdLst>
   <p:sldSz cx="12192000" cy="6858000"/>
   <p:notesSz cx="6858000" cy="9144000"/>
@@ -112,6 +111,11 @@
       </a:defRPr>
     </a:lvl9pPr>
   </p:defaultTextStyle>
+  <p:extLst>
+    <p:ext uri="{EFAFB233-063F-42B5-8137-9DF3F51BA10A}">
+      <p15:sldGuideLst xmlns:p15="http://schemas.microsoft.com/office/powerpoint/2012/main"/>
+    </p:ext>
+  </p:extLst>
 </p:presentation>
 </file>
 
@@ -264,7 +268,7 @@
           <a:p>
             <a:fld id="{003B5CCA-D0DC-4F45-BB58-85BD5DF4C5D0}" type="datetimeFigureOut">
               <a:rPr lang="LID4096" smtClean="0"/>
-              <a:t>01/20/2025</a:t>
+              <a:t>01/24/2025</a:t>
             </a:fld>
             <a:endParaRPr lang="LID4096"/>
           </a:p>
@@ -464,7 +468,7 @@
           <a:p>
             <a:fld id="{003B5CCA-D0DC-4F45-BB58-85BD5DF4C5D0}" type="datetimeFigureOut">
               <a:rPr lang="LID4096" smtClean="0"/>
-              <a:t>01/20/2025</a:t>
+              <a:t>01/24/2025</a:t>
             </a:fld>
             <a:endParaRPr lang="LID4096"/>
           </a:p>
@@ -674,7 +678,7 @@
           <a:p>
             <a:fld id="{003B5CCA-D0DC-4F45-BB58-85BD5DF4C5D0}" type="datetimeFigureOut">
               <a:rPr lang="LID4096" smtClean="0"/>
-              <a:t>01/20/2025</a:t>
+              <a:t>01/24/2025</a:t>
             </a:fld>
             <a:endParaRPr lang="LID4096"/>
           </a:p>
@@ -874,7 +878,7 @@
           <a:p>
             <a:fld id="{003B5CCA-D0DC-4F45-BB58-85BD5DF4C5D0}" type="datetimeFigureOut">
               <a:rPr lang="LID4096" smtClean="0"/>
-              <a:t>01/20/2025</a:t>
+              <a:t>01/24/2025</a:t>
             </a:fld>
             <a:endParaRPr lang="LID4096"/>
           </a:p>
@@ -1150,7 +1154,7 @@
           <a:p>
             <a:fld id="{003B5CCA-D0DC-4F45-BB58-85BD5DF4C5D0}" type="datetimeFigureOut">
               <a:rPr lang="LID4096" smtClean="0"/>
-              <a:t>01/20/2025</a:t>
+              <a:t>01/24/2025</a:t>
             </a:fld>
             <a:endParaRPr lang="LID4096"/>
           </a:p>
@@ -1418,7 +1422,7 @@
           <a:p>
             <a:fld id="{003B5CCA-D0DC-4F45-BB58-85BD5DF4C5D0}" type="datetimeFigureOut">
               <a:rPr lang="LID4096" smtClean="0"/>
-              <a:t>01/20/2025</a:t>
+              <a:t>01/24/2025</a:t>
             </a:fld>
             <a:endParaRPr lang="LID4096"/>
           </a:p>
@@ -1833,7 +1837,7 @@
           <a:p>
             <a:fld id="{003B5CCA-D0DC-4F45-BB58-85BD5DF4C5D0}" type="datetimeFigureOut">
               <a:rPr lang="LID4096" smtClean="0"/>
-              <a:t>01/20/2025</a:t>
+              <a:t>01/24/2025</a:t>
             </a:fld>
             <a:endParaRPr lang="LID4096"/>
           </a:p>
@@ -1975,7 +1979,7 @@
           <a:p>
             <a:fld id="{003B5CCA-D0DC-4F45-BB58-85BD5DF4C5D0}" type="datetimeFigureOut">
               <a:rPr lang="LID4096" smtClean="0"/>
-              <a:t>01/20/2025</a:t>
+              <a:t>01/24/2025</a:t>
             </a:fld>
             <a:endParaRPr lang="LID4096"/>
           </a:p>
@@ -2088,7 +2092,7 @@
           <a:p>
             <a:fld id="{003B5CCA-D0DC-4F45-BB58-85BD5DF4C5D0}" type="datetimeFigureOut">
               <a:rPr lang="LID4096" smtClean="0"/>
-              <a:t>01/20/2025</a:t>
+              <a:t>01/24/2025</a:t>
             </a:fld>
             <a:endParaRPr lang="LID4096"/>
           </a:p>
@@ -2401,7 +2405,7 @@
           <a:p>
             <a:fld id="{003B5CCA-D0DC-4F45-BB58-85BD5DF4C5D0}" type="datetimeFigureOut">
               <a:rPr lang="LID4096" smtClean="0"/>
-              <a:t>01/20/2025</a:t>
+              <a:t>01/24/2025</a:t>
             </a:fld>
             <a:endParaRPr lang="LID4096"/>
           </a:p>
@@ -2690,7 +2694,7 @@
           <a:p>
             <a:fld id="{003B5CCA-D0DC-4F45-BB58-85BD5DF4C5D0}" type="datetimeFigureOut">
               <a:rPr lang="LID4096" smtClean="0"/>
-              <a:t>01/20/2025</a:t>
+              <a:t>01/24/2025</a:t>
             </a:fld>
             <a:endParaRPr lang="LID4096"/>
           </a:p>
@@ -2933,7 +2937,7 @@
           <a:p>
             <a:fld id="{003B5CCA-D0DC-4F45-BB58-85BD5DF4C5D0}" type="datetimeFigureOut">
               <a:rPr lang="LID4096" smtClean="0"/>
-              <a:t>01/20/2025</a:t>
+              <a:t>01/24/2025</a:t>
             </a:fld>
             <a:endParaRPr lang="LID4096"/>
           </a:p>
@@ -3373,11 +3377,44 @@
           <a:p>
             <a:r>
               <a:rPr lang="de-DE" dirty="0"/>
-              <a:t>Title </a:t>
+              <a:t>Y1 Block B Final </a:t>
             </a:r>
             <a:r>
               <a:rPr lang="de-DE" dirty="0" err="1"/>
-              <a:t>of</a:t>
+              <a:t>Presentation</a:t>
+            </a:r>
+            <a:endParaRPr lang="LID4096" dirty="0"/>
+          </a:p>
+        </p:txBody>
+      </p:sp>
+      <p:sp>
+        <p:nvSpPr>
+          <p:cNvPr id="3" name="Subtitle 2">
+            <a:extLst>
+              <a:ext uri="{FF2B5EF4-FFF2-40B4-BE49-F238E27FC236}">
+                <a16:creationId xmlns:a16="http://schemas.microsoft.com/office/drawing/2014/main" id="{63E863FF-B780-0A0E-F133-FC2B3E598F63}"/>
+              </a:ext>
+            </a:extLst>
+          </p:cNvPr>
+          <p:cNvSpPr>
+            <a:spLocks noGrp="1"/>
+          </p:cNvSpPr>
+          <p:nvPr>
+            <p:ph type="subTitle" idx="1"/>
+          </p:nvPr>
+        </p:nvSpPr>
+        <p:spPr/>
+        <p:txBody>
+          <a:bodyPr/>
+          <a:lstStyle/>
+          <a:p>
+            <a:r>
+              <a:rPr lang="de-DE" dirty="0"/>
+              <a:t>Maks Burchard, Applied Data Science &amp; </a:t>
+            </a:r>
+            <a:r>
+              <a:rPr lang="de-DE" dirty="0" err="1"/>
+              <a:t>Artificial</a:t>
             </a:r>
             <a:r>
               <a:rPr lang="de-DE" dirty="0"/>
@@ -3385,55 +3422,14 @@
             </a:r>
             <a:r>
               <a:rPr lang="de-DE" dirty="0" err="1"/>
-              <a:t>presentation</a:t>
-            </a:r>
-            <a:endParaRPr lang="LID4096" dirty="0"/>
-          </a:p>
-        </p:txBody>
-      </p:sp>
-      <p:sp>
-        <p:nvSpPr>
-          <p:cNvPr id="3" name="Subtitle 2">
-            <a:extLst>
-              <a:ext uri="{FF2B5EF4-FFF2-40B4-BE49-F238E27FC236}">
-                <a16:creationId xmlns:a16="http://schemas.microsoft.com/office/drawing/2014/main" id="{63E863FF-B780-0A0E-F133-FC2B3E598F63}"/>
-              </a:ext>
-            </a:extLst>
-          </p:cNvPr>
-          <p:cNvSpPr>
-            <a:spLocks noGrp="1"/>
-          </p:cNvSpPr>
-          <p:nvPr>
-            <p:ph type="subTitle" idx="1"/>
-          </p:nvPr>
-        </p:nvSpPr>
-        <p:spPr/>
-        <p:txBody>
-          <a:bodyPr/>
-          <a:lstStyle/>
+              <a:t>Intelligence</a:t>
+            </a:r>
+            <a:endParaRPr lang="de-DE" dirty="0"/>
+          </a:p>
           <a:p>
             <a:r>
               <a:rPr lang="de-DE" dirty="0"/>
-              <a:t>Maks Burchard, Applied Data Science &amp; </a:t>
-            </a:r>
-            <a:r>
-              <a:rPr lang="de-DE" dirty="0" err="1"/>
-              <a:t>Artificial</a:t>
-            </a:r>
-            <a:r>
-              <a:rPr lang="de-DE" dirty="0"/>
-              <a:t> </a:t>
-            </a:r>
-            <a:r>
-              <a:rPr lang="de-DE" dirty="0" err="1"/>
-              <a:t>Intelligence</a:t>
-            </a:r>
-            <a:endParaRPr lang="de-DE" dirty="0"/>
-          </a:p>
-          <a:p>
-            <a:r>
-              <a:rPr lang="de-DE" dirty="0"/>
-              <a:t>Block B Final </a:t>
+              <a:t>Y1, Block B, Final </a:t>
             </a:r>
             <a:r>
               <a:rPr lang="de-DE" dirty="0" err="1"/>
@@ -3525,43 +3521,60 @@
           <a:p>
             <a:r>
               <a:rPr lang="de-DE" dirty="0"/>
-              <a:t>Part 1</a:t>
+              <a:t>Project Description</a:t>
             </a:r>
           </a:p>
           <a:p>
             <a:r>
               <a:rPr lang="de-DE" dirty="0"/>
-              <a:t>Part 2</a:t>
-            </a:r>
+              <a:t>Problem </a:t>
+            </a:r>
+            <a:r>
+              <a:rPr lang="de-DE" dirty="0" err="1"/>
+              <a:t>overview</a:t>
+            </a:r>
+            <a:endParaRPr lang="de-DE" dirty="0"/>
           </a:p>
           <a:p>
             <a:r>
               <a:rPr lang="de-DE" dirty="0"/>
-              <a:t>Part 3</a:t>
-            </a:r>
+              <a:t>Model </a:t>
+            </a:r>
+            <a:r>
+              <a:rPr lang="de-DE" dirty="0" err="1"/>
+              <a:t>overview</a:t>
+            </a:r>
+            <a:endParaRPr lang="de-DE" dirty="0"/>
           </a:p>
           <a:p>
             <a:r>
               <a:rPr lang="de-DE" dirty="0"/>
-              <a:t>Part 4</a:t>
-            </a:r>
-          </a:p>
-          <a:p>
+              <a:t>Trade off</a:t>
+            </a:r>
+          </a:p>
+          <a:p>
+            <a:r>
+              <a:rPr lang="de-DE" dirty="0" err="1"/>
+              <a:t>Analysation</a:t>
+            </a:r>
             <a:r>
               <a:rPr lang="de-DE" dirty="0"/>
-              <a:t>Part 5</a:t>
-            </a:r>
+              <a:t> &amp; </a:t>
+            </a:r>
+            <a:r>
+              <a:rPr lang="de-DE" dirty="0" err="1"/>
+              <a:t>justification</a:t>
+            </a:r>
+            <a:endParaRPr lang="de-DE" dirty="0"/>
           </a:p>
           <a:p>
             <a:r>
               <a:rPr lang="de-DE" dirty="0"/>
-              <a:t>Part 6</a:t>
-            </a:r>
-          </a:p>
-          <a:p>
-            <a:r>
-              <a:rPr lang="de-DE" dirty="0"/>
-              <a:t>Part 7</a:t>
+              <a:t>Final </a:t>
+            </a:r>
+            <a:r>
+              <a:rPr lang="de-DE" dirty="0" err="1"/>
+              <a:t>analysis</a:t>
             </a:r>
             <a:endParaRPr lang="LID4096" dirty="0"/>
           </a:p>
@@ -3642,22 +3655,37 @@
             <p:ph sz="half" idx="1"/>
           </p:nvPr>
         </p:nvSpPr>
-        <p:spPr/>
-        <p:txBody>
-          <a:bodyPr/>
-          <a:lstStyle/>
-          <a:p>
+        <p:spPr>
+          <a:xfrm>
+            <a:off x="838200" y="1825625"/>
+            <a:ext cx="10515600" cy="4351338"/>
+          </a:xfrm>
+        </p:spPr>
+        <p:txBody>
+          <a:bodyPr/>
+          <a:lstStyle/>
+          <a:p>
+            <a:r>
+              <a:rPr lang="de-DE" dirty="0"/>
+              <a:t>Medical </a:t>
+            </a:r>
             <a:r>
               <a:rPr lang="de-DE" dirty="0" err="1"/>
-              <a:t>Determine</a:t>
-            </a:r>
+              <a:t>data</a:t>
+            </a:r>
+            <a:endParaRPr lang="de-DE" dirty="0"/>
+          </a:p>
+          <a:p>
+            <a:endParaRPr lang="de-DE" dirty="0"/>
+          </a:p>
+          <a:p>
             <a:r>
               <a:rPr lang="de-DE" dirty="0"/>
-              <a:t> &amp; </a:t>
+              <a:t>Lots </a:t>
             </a:r>
             <a:r>
               <a:rPr lang="de-DE" dirty="0" err="1"/>
-              <a:t>understand</a:t>
+              <a:t>of</a:t>
             </a:r>
             <a:r>
               <a:rPr lang="de-DE" dirty="0"/>
@@ -3665,7 +3693,24 @@
             </a:r>
             <a:r>
               <a:rPr lang="de-DE" dirty="0" err="1"/>
-              <a:t>business</a:t>
+              <a:t>correlations</a:t>
+            </a:r>
+            <a:r>
+              <a:rPr lang="de-DE" dirty="0"/>
+              <a:t> (EDA)</a:t>
+            </a:r>
+          </a:p>
+          <a:p>
+            <a:endParaRPr lang="de-DE" dirty="0"/>
+          </a:p>
+          <a:p>
+            <a:r>
+              <a:rPr lang="de-DE" dirty="0"/>
+              <a:t>Lots </a:t>
+            </a:r>
+            <a:r>
+              <a:rPr lang="de-DE" dirty="0" err="1"/>
+              <a:t>of</a:t>
             </a:r>
             <a:r>
               <a:rPr lang="de-DE" dirty="0"/>
@@ -3673,42 +3718,15 @@
             </a:r>
             <a:r>
               <a:rPr lang="de-DE" dirty="0" err="1"/>
-              <a:t>case</a:t>
-            </a:r>
-            <a:r>
-              <a:rPr lang="de-DE" dirty="0"/>
-              <a:t> &amp; </a:t>
-            </a:r>
-            <a:r>
-              <a:rPr lang="de-DE" dirty="0" err="1"/>
-              <a:t>dataset</a:t>
-            </a:r>
+              <a:t>options</a:t>
+            </a:r>
+            <a:endParaRPr lang="de-DE" dirty="0"/>
+          </a:p>
+          <a:p>
+            <a:endParaRPr lang="de-DE" dirty="0"/>
+          </a:p>
+          <a:p>
             <a:endParaRPr lang="LID4096" dirty="0"/>
-          </a:p>
-        </p:txBody>
-      </p:sp>
-      <p:sp>
-        <p:nvSpPr>
-          <p:cNvPr id="4" name="Content Placeholder 3">
-            <a:extLst>
-              <a:ext uri="{FF2B5EF4-FFF2-40B4-BE49-F238E27FC236}">
-                <a16:creationId xmlns:a16="http://schemas.microsoft.com/office/drawing/2014/main" id="{28D71CB4-0787-8CE5-902C-37B8A49F247B}"/>
-              </a:ext>
-            </a:extLst>
-          </p:cNvPr>
-          <p:cNvSpPr>
-            <a:spLocks noGrp="1"/>
-          </p:cNvSpPr>
-          <p:nvPr>
-            <p:ph sz="half" idx="2"/>
-          </p:nvPr>
-        </p:nvSpPr>
-        <p:spPr/>
-        <p:txBody>
-          <a:bodyPr/>
-          <a:lstStyle/>
-          <a:p>
-            <a:endParaRPr lang="LID4096"/>
           </a:p>
         </p:txBody>
       </p:sp>
@@ -3798,7 +3816,16 @@
           <a:p>
             <a:r>
               <a:rPr lang="en-US" dirty="0"/>
-              <a:t>Explain your implemented baselines to examine problems that can be addressed by regression or classification or clustering.</a:t>
+              <a:t>Regression</a:t>
+            </a:r>
+          </a:p>
+          <a:p>
+            <a:endParaRPr lang="en-US" dirty="0"/>
+          </a:p>
+          <a:p>
+            <a:r>
+              <a:rPr lang="en-US" dirty="0"/>
+              <a:t>Age</a:t>
             </a:r>
             <a:endParaRPr lang="LID4096" dirty="0"/>
           </a:p>
@@ -3825,7 +3852,7 @@
           <a:bodyPr/>
           <a:lstStyle/>
           <a:p>
-            <a:endParaRPr lang="LID4096"/>
+            <a:endParaRPr lang="LID4096" dirty="0"/>
           </a:p>
         </p:txBody>
       </p:sp>
@@ -3944,35 +3971,49 @@
         </p:nvSpPr>
         <p:spPr>
           <a:xfrm>
-            <a:off x="839789" y="2505075"/>
-            <a:ext cx="3305142" cy="3684588"/>
+            <a:off x="839788" y="2505075"/>
+            <a:ext cx="3538431" cy="3684588"/>
           </a:xfrm>
         </p:spPr>
         <p:txBody>
-          <a:bodyPr/>
-          <a:lstStyle/>
-          <a:p>
-            <a:r>
-              <a:rPr lang="de-DE" dirty="0" err="1"/>
-              <a:t>Explain</a:t>
-            </a:r>
-            <a:r>
-              <a:rPr lang="de-DE" dirty="0"/>
-              <a:t> </a:t>
-            </a:r>
-            <a:r>
-              <a:rPr lang="de-DE" dirty="0" err="1"/>
-              <a:t>creating</a:t>
-            </a:r>
-            <a:r>
-              <a:rPr lang="de-DE" dirty="0"/>
-              <a:t> &amp; </a:t>
-            </a:r>
-            <a:r>
-              <a:rPr lang="de-DE" dirty="0" err="1"/>
-              <a:t>training</a:t>
-            </a:r>
-            <a:endParaRPr lang="LID4096" dirty="0"/>
+          <a:bodyPr>
+            <a:normAutofit/>
+          </a:bodyPr>
+          <a:lstStyle/>
+          <a:p>
+            <a:r>
+              <a:rPr lang="en-US" sz="2400" dirty="0"/>
+              <a:t>Linear Regression </a:t>
+            </a:r>
+          </a:p>
+          <a:p>
+            <a:r>
+              <a:rPr lang="en-US" sz="2400" dirty="0"/>
+              <a:t>Decision Tree </a:t>
+            </a:r>
+          </a:p>
+          <a:p>
+            <a:r>
+              <a:rPr lang="en-US" sz="2400" dirty="0"/>
+              <a:t>Gradient Boosting</a:t>
+            </a:r>
+          </a:p>
+          <a:p>
+            <a:r>
+              <a:rPr lang="en-US" sz="2400" dirty="0" err="1"/>
+              <a:t>XGBoost</a:t>
+            </a:r>
+            <a:endParaRPr lang="en-US" sz="2400" dirty="0"/>
+          </a:p>
+          <a:p>
+            <a:endParaRPr lang="en-US" sz="2400" dirty="0"/>
+          </a:p>
+          <a:p>
+            <a:r>
+              <a:rPr lang="en-US" sz="2400" dirty="0"/>
+              <a:t>Load, pre-process, split</a:t>
+            </a:r>
+            <a:endParaRPr lang="LID4096" sz="2400" dirty="0"/>
           </a:p>
         </p:txBody>
       </p:sp>
@@ -4026,7 +4067,7 @@
         </p:nvSpPr>
         <p:spPr>
           <a:xfrm>
-            <a:off x="7453248" y="1690173"/>
+            <a:off x="7661195" y="1694442"/>
             <a:ext cx="3479894" cy="823912"/>
           </a:xfrm>
           <a:prstGeom prst="rect">
@@ -4226,8 +4267,8 @@
         </p:nvSpPr>
         <p:spPr>
           <a:xfrm>
-            <a:off x="4144930" y="2505075"/>
-            <a:ext cx="3305142" cy="3684588"/>
+            <a:off x="4144929" y="2505075"/>
+            <a:ext cx="3612331" cy="3684588"/>
           </a:xfrm>
           <a:prstGeom prst="rect">
             <a:avLst/>
@@ -4403,26 +4444,34 @@
           </a:lstStyle>
           <a:p>
             <a:r>
-              <a:rPr lang="de-DE" dirty="0" err="1"/>
-              <a:t>Explain</a:t>
-            </a:r>
-            <a:r>
-              <a:rPr lang="de-DE" dirty="0"/>
-              <a:t> </a:t>
-            </a:r>
-            <a:r>
-              <a:rPr lang="de-DE" dirty="0" err="1"/>
-              <a:t>creating</a:t>
-            </a:r>
-            <a:r>
-              <a:rPr lang="de-DE" dirty="0"/>
-              <a:t> &amp; </a:t>
-            </a:r>
-            <a:r>
-              <a:rPr lang="de-DE" dirty="0" err="1"/>
-              <a:t>training</a:t>
-            </a:r>
-            <a:endParaRPr lang="LID4096" dirty="0"/>
+              <a:rPr lang="en-US" sz="2400" dirty="0"/>
+              <a:t>Logistic Regression</a:t>
+            </a:r>
+          </a:p>
+          <a:p>
+            <a:r>
+              <a:rPr lang="en-US" sz="2400" dirty="0"/>
+              <a:t> Random Forest </a:t>
+            </a:r>
+          </a:p>
+          <a:p>
+            <a:r>
+              <a:rPr lang="en-US" sz="2400" dirty="0"/>
+              <a:t>K-Nearest Neighbors</a:t>
+            </a:r>
+          </a:p>
+          <a:p>
+            <a:endParaRPr lang="en-US" sz="2400" dirty="0"/>
+          </a:p>
+          <a:p>
+            <a:r>
+              <a:rPr lang="en-US" sz="2400" dirty="0"/>
+              <a:t>Load, pre-process, split</a:t>
+            </a:r>
+            <a:endParaRPr lang="LID4096" sz="2400" dirty="0"/>
+          </a:p>
+          <a:p>
+            <a:endParaRPr lang="LID4096" sz="2400" dirty="0"/>
           </a:p>
         </p:txBody>
       </p:sp>
@@ -4442,8 +4491,8 @@
         </p:nvSpPr>
         <p:spPr>
           <a:xfrm>
-            <a:off x="7450072" y="2510094"/>
-            <a:ext cx="3305142" cy="3684588"/>
+            <a:off x="7658019" y="2514363"/>
+            <a:ext cx="3694192" cy="3684588"/>
           </a:xfrm>
           <a:prstGeom prst="rect">
             <a:avLst/>
@@ -4619,26 +4668,47 @@
           </a:lstStyle>
           <a:p>
             <a:r>
-              <a:rPr lang="de-DE" dirty="0" err="1"/>
-              <a:t>Explain</a:t>
-            </a:r>
-            <a:r>
-              <a:rPr lang="de-DE" dirty="0"/>
+              <a:rPr lang="de-DE" sz="2400" dirty="0"/>
+              <a:t>K-</a:t>
+            </a:r>
+            <a:r>
+              <a:rPr lang="de-DE" sz="2400" dirty="0" err="1"/>
+              <a:t>Means</a:t>
+            </a:r>
+            <a:endParaRPr lang="de-DE" sz="2400" dirty="0"/>
+          </a:p>
+          <a:p>
+            <a:r>
+              <a:rPr lang="de-DE" sz="2400" dirty="0"/>
+              <a:t>Random </a:t>
+            </a:r>
+            <a:r>
+              <a:rPr lang="de-DE" sz="2400" dirty="0" err="1"/>
+              <a:t>Hierarchical</a:t>
+            </a:r>
+            <a:r>
+              <a:rPr lang="de-DE" sz="2400" dirty="0"/>
               <a:t> </a:t>
             </a:r>
-            <a:r>
-              <a:rPr lang="de-DE" dirty="0" err="1"/>
-              <a:t>creating</a:t>
-            </a:r>
-            <a:r>
-              <a:rPr lang="de-DE" dirty="0"/>
-              <a:t> &amp; </a:t>
-            </a:r>
-            <a:r>
-              <a:rPr lang="de-DE" dirty="0" err="1"/>
-              <a:t>training</a:t>
-            </a:r>
-            <a:endParaRPr lang="LID4096" dirty="0"/>
+          </a:p>
+          <a:p>
+            <a:r>
+              <a:rPr lang="de-DE" sz="2400" dirty="0"/>
+              <a:t>DBSCAN</a:t>
+            </a:r>
+          </a:p>
+          <a:p>
+            <a:endParaRPr lang="de-DE" sz="2400" dirty="0"/>
+          </a:p>
+          <a:p>
+            <a:r>
+              <a:rPr lang="en-US" sz="2400" dirty="0"/>
+              <a:t>Load, pre-process, split, reduce dimensionalities</a:t>
+            </a:r>
+            <a:endParaRPr lang="LID4096" sz="2400" dirty="0"/>
+          </a:p>
+          <a:p>
+            <a:endParaRPr lang="LID4096" sz="2400" dirty="0"/>
           </a:p>
         </p:txBody>
       </p:sp>
@@ -4677,7 +4747,7 @@
           <p:cNvPr id="2" name="Title 1">
             <a:extLst>
               <a:ext uri="{FF2B5EF4-FFF2-40B4-BE49-F238E27FC236}">
-                <a16:creationId xmlns:a16="http://schemas.microsoft.com/office/drawing/2014/main" id="{098FC518-5E86-5F71-5C21-E05B999A4A5E}"/>
+                <a16:creationId xmlns:a16="http://schemas.microsoft.com/office/drawing/2014/main" id="{5262D4B7-B33C-EF93-5C93-B37A01AC0E87}"/>
               </a:ext>
             </a:extLst>
           </p:cNvPr>
@@ -4694,199 +4764,193 @@
           <a:lstStyle/>
           <a:p>
             <a:r>
+              <a:rPr lang="de-DE" dirty="0"/>
+              <a:t>Trade off</a:t>
+            </a:r>
+            <a:endParaRPr lang="LID4096" dirty="0"/>
+          </a:p>
+        </p:txBody>
+      </p:sp>
+      <p:sp>
+        <p:nvSpPr>
+          <p:cNvPr id="3" name="Text Placeholder 2">
+            <a:extLst>
+              <a:ext uri="{FF2B5EF4-FFF2-40B4-BE49-F238E27FC236}">
+                <a16:creationId xmlns:a16="http://schemas.microsoft.com/office/drawing/2014/main" id="{3DE696BD-A866-9FA9-F0EC-9B9076F24137}"/>
+              </a:ext>
+            </a:extLst>
+          </p:cNvPr>
+          <p:cNvSpPr>
+            <a:spLocks noGrp="1"/>
+          </p:cNvSpPr>
+          <p:nvPr>
+            <p:ph type="body" idx="1"/>
+          </p:nvPr>
+        </p:nvSpPr>
+        <p:spPr/>
+        <p:txBody>
+          <a:bodyPr/>
+          <a:lstStyle/>
+          <a:p>
+            <a:r>
+              <a:rPr lang="de-DE" dirty="0"/>
+              <a:t>Performance</a:t>
+            </a:r>
+            <a:endParaRPr lang="LID4096" dirty="0"/>
+          </a:p>
+        </p:txBody>
+      </p:sp>
+      <p:sp>
+        <p:nvSpPr>
+          <p:cNvPr id="4" name="Content Placeholder 3">
+            <a:extLst>
+              <a:ext uri="{FF2B5EF4-FFF2-40B4-BE49-F238E27FC236}">
+                <a16:creationId xmlns:a16="http://schemas.microsoft.com/office/drawing/2014/main" id="{BB03BFB5-F71E-8736-01FC-81DB10BC7EF8}"/>
+              </a:ext>
+            </a:extLst>
+          </p:cNvPr>
+          <p:cNvSpPr>
+            <a:spLocks noGrp="1"/>
+          </p:cNvSpPr>
+          <p:nvPr>
+            <p:ph sz="half" idx="2"/>
+          </p:nvPr>
+        </p:nvSpPr>
+        <p:spPr/>
+        <p:txBody>
+          <a:bodyPr>
+            <a:normAutofit/>
+          </a:bodyPr>
+          <a:lstStyle/>
+          <a:p>
+            <a:r>
+              <a:rPr lang="de-DE" sz="2400" dirty="0"/>
+              <a:t>Hyperparameter </a:t>
+            </a:r>
+            <a:r>
+              <a:rPr lang="de-DE" sz="2400" dirty="0" err="1"/>
+              <a:t>tuning</a:t>
+            </a:r>
+            <a:endParaRPr lang="de-DE" sz="2400" dirty="0"/>
+          </a:p>
+          <a:p>
+            <a:endParaRPr lang="de-DE" sz="2400" dirty="0"/>
+          </a:p>
+          <a:p>
+            <a:r>
+              <a:rPr lang="de-DE" sz="2400" dirty="0"/>
+              <a:t>Models</a:t>
+            </a:r>
+          </a:p>
+          <a:p>
+            <a:endParaRPr lang="de-DE" sz="2400" dirty="0"/>
+          </a:p>
+          <a:p>
+            <a:r>
+              <a:rPr lang="de-DE" sz="2400" dirty="0" err="1"/>
+              <a:t>Computation</a:t>
+            </a:r>
+            <a:endParaRPr lang="LID4096" sz="2400" dirty="0"/>
+          </a:p>
+        </p:txBody>
+      </p:sp>
+      <p:sp>
+        <p:nvSpPr>
+          <p:cNvPr id="5" name="Text Placeholder 4">
+            <a:extLst>
+              <a:ext uri="{FF2B5EF4-FFF2-40B4-BE49-F238E27FC236}">
+                <a16:creationId xmlns:a16="http://schemas.microsoft.com/office/drawing/2014/main" id="{31852C2E-9BDD-56A5-3733-853F5FFB78BA}"/>
+              </a:ext>
+            </a:extLst>
+          </p:cNvPr>
+          <p:cNvSpPr>
+            <a:spLocks noGrp="1"/>
+          </p:cNvSpPr>
+          <p:nvPr>
+            <p:ph type="body" sz="quarter" idx="3"/>
+          </p:nvPr>
+        </p:nvSpPr>
+        <p:spPr/>
+        <p:txBody>
+          <a:bodyPr/>
+          <a:lstStyle/>
+          <a:p>
+            <a:r>
               <a:rPr lang="de-DE" dirty="0" err="1"/>
-              <a:t>Results</a:t>
-            </a:r>
-            <a:r>
-              <a:rPr lang="de-DE" dirty="0"/>
+              <a:t>Interpretability</a:t>
+            </a:r>
+            <a:endParaRPr lang="LID4096" dirty="0"/>
+          </a:p>
+        </p:txBody>
+      </p:sp>
+      <p:sp>
+        <p:nvSpPr>
+          <p:cNvPr id="6" name="Content Placeholder 5">
+            <a:extLst>
+              <a:ext uri="{FF2B5EF4-FFF2-40B4-BE49-F238E27FC236}">
+                <a16:creationId xmlns:a16="http://schemas.microsoft.com/office/drawing/2014/main" id="{7327A23F-BC1C-7964-BECE-762DAEE30EEC}"/>
+              </a:ext>
+            </a:extLst>
+          </p:cNvPr>
+          <p:cNvSpPr>
+            <a:spLocks noGrp="1"/>
+          </p:cNvSpPr>
+          <p:nvPr>
+            <p:ph sz="quarter" idx="4"/>
+          </p:nvPr>
+        </p:nvSpPr>
+        <p:spPr/>
+        <p:txBody>
+          <a:bodyPr/>
+          <a:lstStyle/>
+          <a:p>
+            <a:r>
+              <a:rPr lang="de-DE" sz="2400" dirty="0"/>
+              <a:t>Outside </a:t>
+            </a:r>
+            <a:r>
+              <a:rPr lang="de-DE" sz="2400" dirty="0" err="1"/>
+              <a:t>your</a:t>
+            </a:r>
+            <a:r>
+              <a:rPr lang="de-DE" sz="2400" dirty="0"/>
               <a:t> </a:t>
             </a:r>
             <a:r>
-              <a:rPr lang="de-DE" dirty="0" err="1"/>
-              <a:t>obtained</a:t>
-            </a:r>
-            <a:r>
-              <a:rPr lang="de-DE" dirty="0"/>
-              <a:t> </a:t>
-            </a:r>
-            <a:r>
-              <a:rPr lang="de-DE" dirty="0" err="1"/>
-              <a:t>with</a:t>
-            </a:r>
-            <a:r>
-              <a:rPr lang="de-DE" dirty="0"/>
-              <a:t> final </a:t>
-            </a:r>
-            <a:r>
-              <a:rPr lang="de-DE" dirty="0" err="1"/>
-              <a:t>version</a:t>
-            </a:r>
-            <a:endParaRPr lang="LID4096" dirty="0"/>
-          </a:p>
-        </p:txBody>
-      </p:sp>
-      <p:sp>
-        <p:nvSpPr>
-          <p:cNvPr id="3" name="Picture Placeholder 2">
-            <a:extLst>
-              <a:ext uri="{FF2B5EF4-FFF2-40B4-BE49-F238E27FC236}">
-                <a16:creationId xmlns:a16="http://schemas.microsoft.com/office/drawing/2014/main" id="{B9979C39-6D68-3DA4-9424-D552B57C052F}"/>
-              </a:ext>
-            </a:extLst>
-          </p:cNvPr>
-          <p:cNvSpPr>
-            <a:spLocks noGrp="1"/>
-          </p:cNvSpPr>
-          <p:nvPr>
-            <p:ph type="pic" idx="1"/>
-          </p:nvPr>
-        </p:nvSpPr>
-        <p:spPr/>
-        <p:txBody>
-          <a:bodyPr/>
-          <a:lstStyle/>
-          <a:p>
-            <a:r>
-              <a:rPr lang="de-DE" dirty="0"/>
-              <a:t>Add </a:t>
-            </a:r>
-            <a:r>
-              <a:rPr lang="de-DE" dirty="0" err="1"/>
-              <a:t>image</a:t>
-            </a:r>
-            <a:r>
-              <a:rPr lang="de-DE" dirty="0"/>
-              <a:t> </a:t>
-            </a:r>
-            <a:r>
-              <a:rPr lang="de-DE" dirty="0" err="1"/>
-              <a:t>of</a:t>
-            </a:r>
-            <a:r>
-              <a:rPr lang="de-DE" dirty="0"/>
-              <a:t> </a:t>
-            </a:r>
-            <a:r>
-              <a:rPr lang="de-DE" dirty="0" err="1"/>
-              <a:t>results</a:t>
-            </a:r>
-            <a:r>
-              <a:rPr lang="de-DE" dirty="0"/>
-              <a:t> </a:t>
-            </a:r>
-            <a:r>
-              <a:rPr lang="de-DE" dirty="0" err="1"/>
-              <a:t>of</a:t>
-            </a:r>
-            <a:r>
-              <a:rPr lang="de-DE" dirty="0"/>
-              <a:t> final </a:t>
-            </a:r>
-            <a:r>
-              <a:rPr lang="de-DE" dirty="0" err="1"/>
-              <a:t>model</a:t>
-            </a:r>
-            <a:r>
-              <a:rPr lang="de-DE" dirty="0"/>
-              <a:t> </a:t>
-            </a:r>
-            <a:r>
-              <a:rPr lang="de-DE" dirty="0" err="1"/>
-              <a:t>version</a:t>
-            </a:r>
-            <a:endParaRPr lang="LID4096" dirty="0"/>
-          </a:p>
-        </p:txBody>
-      </p:sp>
-      <p:sp>
-        <p:nvSpPr>
-          <p:cNvPr id="4" name="Text Placeholder 3">
-            <a:extLst>
-              <a:ext uri="{FF2B5EF4-FFF2-40B4-BE49-F238E27FC236}">
-                <a16:creationId xmlns:a16="http://schemas.microsoft.com/office/drawing/2014/main" id="{873C7BA5-F4B2-F72B-B47D-98E1738C6C68}"/>
-              </a:ext>
-            </a:extLst>
-          </p:cNvPr>
-          <p:cNvSpPr>
-            <a:spLocks noGrp="1"/>
-          </p:cNvSpPr>
-          <p:nvPr>
-            <p:ph type="body" sz="half" idx="2"/>
-          </p:nvPr>
-        </p:nvSpPr>
-        <p:spPr/>
-        <p:txBody>
-          <a:bodyPr/>
-          <a:lstStyle/>
-          <a:p>
-            <a:r>
-              <a:rPr lang="de-DE" dirty="0"/>
-              <a:t>Add </a:t>
-            </a:r>
-            <a:r>
-              <a:rPr lang="de-DE" dirty="0" err="1"/>
-              <a:t>text</a:t>
-            </a:r>
-            <a:r>
-              <a:rPr lang="de-DE" dirty="0"/>
-              <a:t> </a:t>
-            </a:r>
-            <a:r>
-              <a:rPr lang="de-DE" dirty="0" err="1"/>
-              <a:t>here</a:t>
-            </a:r>
-            <a:r>
-              <a:rPr lang="de-DE" dirty="0"/>
-              <a:t> </a:t>
-            </a:r>
-            <a:r>
-              <a:rPr lang="de-DE" dirty="0" err="1"/>
-              <a:t>describing</a:t>
-            </a:r>
-            <a:r>
-              <a:rPr lang="de-DE" dirty="0"/>
-              <a:t> </a:t>
-            </a:r>
-            <a:r>
-              <a:rPr lang="de-DE" dirty="0" err="1"/>
-              <a:t>the</a:t>
-            </a:r>
-            <a:r>
-              <a:rPr lang="de-DE" dirty="0"/>
-              <a:t> </a:t>
-            </a:r>
-            <a:r>
-              <a:rPr lang="de-DE" dirty="0" err="1"/>
-              <a:t>results</a:t>
-            </a:r>
-            <a:r>
-              <a:rPr lang="de-DE" dirty="0"/>
-              <a:t> &amp; final </a:t>
-            </a:r>
-            <a:r>
-              <a:rPr lang="de-DE" dirty="0" err="1"/>
-              <a:t>model</a:t>
-            </a:r>
-            <a:r>
-              <a:rPr lang="de-DE" dirty="0"/>
-              <a:t> </a:t>
-            </a:r>
-            <a:r>
-              <a:rPr lang="de-DE" dirty="0" err="1"/>
-              <a:t>version</a:t>
-            </a:r>
-            <a:r>
-              <a:rPr lang="de-DE" dirty="0"/>
-              <a:t>.</a:t>
-            </a:r>
-            <a:endParaRPr lang="LID4096" dirty="0"/>
+              <a:rPr lang="de-DE" sz="2400" dirty="0" err="1"/>
+              <a:t>knowledge</a:t>
+            </a:r>
+            <a:endParaRPr lang="LID4096" sz="2400" dirty="0"/>
+          </a:p>
+          <a:p>
+            <a:endParaRPr lang="de-DE" sz="2400" dirty="0"/>
+          </a:p>
+          <a:p>
+            <a:r>
+              <a:rPr lang="de-DE" sz="2400" dirty="0"/>
+              <a:t>At a </a:t>
+            </a:r>
+            <a:r>
+              <a:rPr lang="de-DE" sz="2400" dirty="0" err="1"/>
+              <a:t>glance</a:t>
+            </a:r>
+            <a:endParaRPr lang="de-DE" sz="2400" dirty="0"/>
+          </a:p>
+          <a:p>
+            <a:endParaRPr lang="de-DE" sz="2400" dirty="0"/>
+          </a:p>
+          <a:p>
+            <a:r>
+              <a:rPr lang="de-DE" sz="2400" dirty="0"/>
+              <a:t>Crash</a:t>
+            </a:r>
           </a:p>
         </p:txBody>
       </p:sp>
     </p:spTree>
     <p:extLst>
       <p:ext uri="{BB962C8B-B14F-4D97-AF65-F5344CB8AC3E}">
-        <p14:creationId xmlns:p14="http://schemas.microsoft.com/office/powerpoint/2010/main" val="2147966741"/>
+        <p14:creationId xmlns:p14="http://schemas.microsoft.com/office/powerpoint/2010/main" val="2176239794"/>
       </p:ext>
     </p:extLst>
   </p:cSld>
@@ -4918,7 +4982,7 @@
           <p:cNvPr id="2" name="Title 1">
             <a:extLst>
               <a:ext uri="{FF2B5EF4-FFF2-40B4-BE49-F238E27FC236}">
-                <a16:creationId xmlns:a16="http://schemas.microsoft.com/office/drawing/2014/main" id="{5262D4B7-B33C-EF93-5C93-B37A01AC0E87}"/>
+                <a16:creationId xmlns:a16="http://schemas.microsoft.com/office/drawing/2014/main" id="{6235348D-2D83-7C7E-1DFD-207E0386385E}"/>
               </a:ext>
             </a:extLst>
           </p:cNvPr>
@@ -4935,8 +4999,16 @@
           <a:lstStyle/>
           <a:p>
             <a:r>
+              <a:rPr lang="de-DE" dirty="0" err="1"/>
+              <a:t>Analysation</a:t>
+            </a:r>
+            <a:r>
               <a:rPr lang="de-DE" dirty="0"/>
-              <a:t>Trade off</a:t>
+              <a:t> &amp; </a:t>
+            </a:r>
+            <a:r>
+              <a:rPr lang="de-DE" dirty="0" err="1"/>
+              <a:t>justification</a:t>
             </a:r>
             <a:endParaRPr lang="LID4096" dirty="0"/>
           </a:p>
@@ -4944,28 +5016,258 @@
       </p:sp>
       <p:sp>
         <p:nvSpPr>
-          <p:cNvPr id="3" name="Text Placeholder 2">
-            <a:extLst>
-              <a:ext uri="{FF2B5EF4-FFF2-40B4-BE49-F238E27FC236}">
-                <a16:creationId xmlns:a16="http://schemas.microsoft.com/office/drawing/2014/main" id="{3DE696BD-A866-9FA9-F0EC-9B9076F24137}"/>
-              </a:ext>
-            </a:extLst>
-          </p:cNvPr>
-          <p:cNvSpPr>
-            <a:spLocks noGrp="1"/>
-          </p:cNvSpPr>
-          <p:nvPr>
-            <p:ph type="body" idx="1"/>
-          </p:nvPr>
-        </p:nvSpPr>
-        <p:spPr/>
-        <p:txBody>
-          <a:bodyPr/>
-          <a:lstStyle/>
+          <p:cNvPr id="8" name="Content Placeholder 3">
+            <a:extLst>
+              <a:ext uri="{FF2B5EF4-FFF2-40B4-BE49-F238E27FC236}">
+                <a16:creationId xmlns:a16="http://schemas.microsoft.com/office/drawing/2014/main" id="{15116CCB-1BA7-BAA4-D02D-56C5FB641E73}"/>
+              </a:ext>
+            </a:extLst>
+          </p:cNvPr>
+          <p:cNvSpPr>
+            <a:spLocks noGrp="1"/>
+          </p:cNvSpPr>
+          <p:nvPr>
+            <p:ph sz="half" idx="2"/>
+          </p:nvPr>
+        </p:nvSpPr>
+        <p:spPr>
+          <a:xfrm>
+            <a:off x="839788" y="2505075"/>
+            <a:ext cx="3538431" cy="3684588"/>
+          </a:xfrm>
+        </p:spPr>
+        <p:txBody>
+          <a:bodyPr>
+            <a:normAutofit/>
+          </a:bodyPr>
+          <a:lstStyle/>
+          <a:p>
+            <a:r>
+              <a:rPr lang="en-US" sz="2400" dirty="0"/>
+              <a:t>Decision Tree </a:t>
+            </a:r>
+          </a:p>
+          <a:p>
+            <a:endParaRPr lang="en-US" sz="2400" dirty="0"/>
+          </a:p>
+          <a:p>
+            <a:r>
+              <a:rPr lang="en-US" sz="2400" dirty="0"/>
+              <a:t>Eeks out win</a:t>
+            </a:r>
+          </a:p>
+          <a:p>
+            <a:endParaRPr lang="en-US" sz="2400" dirty="0"/>
+          </a:p>
+          <a:p>
+            <a:r>
+              <a:rPr lang="en-US" sz="2400" dirty="0"/>
+              <a:t>Lowest scores</a:t>
+            </a:r>
+          </a:p>
+          <a:p>
+            <a:pPr marL="0" indent="0">
+              <a:buNone/>
+            </a:pPr>
+            <a:endParaRPr lang="LID4096" sz="2400" dirty="0"/>
+          </a:p>
+        </p:txBody>
+      </p:sp>
+      <p:sp>
+        <p:nvSpPr>
+          <p:cNvPr id="10" name="Text Placeholder 4">
+            <a:extLst>
+              <a:ext uri="{FF2B5EF4-FFF2-40B4-BE49-F238E27FC236}">
+                <a16:creationId xmlns:a16="http://schemas.microsoft.com/office/drawing/2014/main" id="{CBAE6289-C192-1F6C-2055-FCE9799DA0C4}"/>
+              </a:ext>
+            </a:extLst>
+          </p:cNvPr>
+          <p:cNvSpPr txBox="1">
+            <a:spLocks/>
+          </p:cNvSpPr>
+          <p:nvPr/>
+        </p:nvSpPr>
+        <p:spPr>
+          <a:xfrm>
+            <a:off x="7661195" y="1694442"/>
+            <a:ext cx="3479894" cy="823912"/>
+          </a:xfrm>
+          <a:prstGeom prst="rect">
+            <a:avLst/>
+          </a:prstGeom>
+        </p:spPr>
+        <p:txBody>
+          <a:bodyPr vert="horz" lIns="91440" tIns="45720" rIns="91440" bIns="45720" rtlCol="0" anchor="b">
+            <a:normAutofit/>
+          </a:bodyPr>
+          <a:lstStyle>
+            <a:lvl1pPr marL="0" indent="0" algn="l" defTabSz="914400" rtl="0" eaLnBrk="1" latinLnBrk="0" hangingPunct="1">
+              <a:lnSpc>
+                <a:spcPct val="90000"/>
+              </a:lnSpc>
+              <a:spcBef>
+                <a:spcPts val="1000"/>
+              </a:spcBef>
+              <a:buFont typeface="Arial" panose="020B0604020202020204" pitchFamily="34" charset="0"/>
+              <a:buNone/>
+              <a:defRPr sz="2400" b="1" kern="1200">
+                <a:solidFill>
+                  <a:schemeClr val="tx1"/>
+                </a:solidFill>
+                <a:latin typeface="+mn-lt"/>
+                <a:ea typeface="+mn-ea"/>
+                <a:cs typeface="+mn-cs"/>
+              </a:defRPr>
+            </a:lvl1pPr>
+            <a:lvl2pPr marL="457200" indent="0" algn="l" defTabSz="914400" rtl="0" eaLnBrk="1" latinLnBrk="0" hangingPunct="1">
+              <a:lnSpc>
+                <a:spcPct val="90000"/>
+              </a:lnSpc>
+              <a:spcBef>
+                <a:spcPts val="500"/>
+              </a:spcBef>
+              <a:buFont typeface="Arial" panose="020B0604020202020204" pitchFamily="34" charset="0"/>
+              <a:buNone/>
+              <a:defRPr sz="2000" b="1" kern="1200">
+                <a:solidFill>
+                  <a:schemeClr val="tx1"/>
+                </a:solidFill>
+                <a:latin typeface="+mn-lt"/>
+                <a:ea typeface="+mn-ea"/>
+                <a:cs typeface="+mn-cs"/>
+              </a:defRPr>
+            </a:lvl2pPr>
+            <a:lvl3pPr marL="914400" indent="0" algn="l" defTabSz="914400" rtl="0" eaLnBrk="1" latinLnBrk="0" hangingPunct="1">
+              <a:lnSpc>
+                <a:spcPct val="90000"/>
+              </a:lnSpc>
+              <a:spcBef>
+                <a:spcPts val="500"/>
+              </a:spcBef>
+              <a:buFont typeface="Arial" panose="020B0604020202020204" pitchFamily="34" charset="0"/>
+              <a:buNone/>
+              <a:defRPr sz="1800" b="1" kern="1200">
+                <a:solidFill>
+                  <a:schemeClr val="tx1"/>
+                </a:solidFill>
+                <a:latin typeface="+mn-lt"/>
+                <a:ea typeface="+mn-ea"/>
+                <a:cs typeface="+mn-cs"/>
+              </a:defRPr>
+            </a:lvl3pPr>
+            <a:lvl4pPr marL="1371600" indent="0" algn="l" defTabSz="914400" rtl="0" eaLnBrk="1" latinLnBrk="0" hangingPunct="1">
+              <a:lnSpc>
+                <a:spcPct val="90000"/>
+              </a:lnSpc>
+              <a:spcBef>
+                <a:spcPts val="500"/>
+              </a:spcBef>
+              <a:buFont typeface="Arial" panose="020B0604020202020204" pitchFamily="34" charset="0"/>
+              <a:buNone/>
+              <a:defRPr sz="1600" b="1" kern="1200">
+                <a:solidFill>
+                  <a:schemeClr val="tx1"/>
+                </a:solidFill>
+                <a:latin typeface="+mn-lt"/>
+                <a:ea typeface="+mn-ea"/>
+                <a:cs typeface="+mn-cs"/>
+              </a:defRPr>
+            </a:lvl4pPr>
+            <a:lvl5pPr marL="1828800" indent="0" algn="l" defTabSz="914400" rtl="0" eaLnBrk="1" latinLnBrk="0" hangingPunct="1">
+              <a:lnSpc>
+                <a:spcPct val="90000"/>
+              </a:lnSpc>
+              <a:spcBef>
+                <a:spcPts val="500"/>
+              </a:spcBef>
+              <a:buFont typeface="Arial" panose="020B0604020202020204" pitchFamily="34" charset="0"/>
+              <a:buNone/>
+              <a:defRPr sz="1600" b="1" kern="1200">
+                <a:solidFill>
+                  <a:schemeClr val="tx1"/>
+                </a:solidFill>
+                <a:latin typeface="+mn-lt"/>
+                <a:ea typeface="+mn-ea"/>
+                <a:cs typeface="+mn-cs"/>
+              </a:defRPr>
+            </a:lvl5pPr>
+            <a:lvl6pPr marL="2286000" indent="0" algn="l" defTabSz="914400" rtl="0" eaLnBrk="1" latinLnBrk="0" hangingPunct="1">
+              <a:lnSpc>
+                <a:spcPct val="90000"/>
+              </a:lnSpc>
+              <a:spcBef>
+                <a:spcPts val="500"/>
+              </a:spcBef>
+              <a:buFont typeface="Arial" panose="020B0604020202020204" pitchFamily="34" charset="0"/>
+              <a:buNone/>
+              <a:defRPr sz="1600" b="1" kern="1200">
+                <a:solidFill>
+                  <a:schemeClr val="tx1"/>
+                </a:solidFill>
+                <a:latin typeface="+mn-lt"/>
+                <a:ea typeface="+mn-ea"/>
+                <a:cs typeface="+mn-cs"/>
+              </a:defRPr>
+            </a:lvl6pPr>
+            <a:lvl7pPr marL="2743200" indent="0" algn="l" defTabSz="914400" rtl="0" eaLnBrk="1" latinLnBrk="0" hangingPunct="1">
+              <a:lnSpc>
+                <a:spcPct val="90000"/>
+              </a:lnSpc>
+              <a:spcBef>
+                <a:spcPts val="500"/>
+              </a:spcBef>
+              <a:buFont typeface="Arial" panose="020B0604020202020204" pitchFamily="34" charset="0"/>
+              <a:buNone/>
+              <a:defRPr sz="1600" b="1" kern="1200">
+                <a:solidFill>
+                  <a:schemeClr val="tx1"/>
+                </a:solidFill>
+                <a:latin typeface="+mn-lt"/>
+                <a:ea typeface="+mn-ea"/>
+                <a:cs typeface="+mn-cs"/>
+              </a:defRPr>
+            </a:lvl7pPr>
+            <a:lvl8pPr marL="3200400" indent="0" algn="l" defTabSz="914400" rtl="0" eaLnBrk="1" latinLnBrk="0" hangingPunct="1">
+              <a:lnSpc>
+                <a:spcPct val="90000"/>
+              </a:lnSpc>
+              <a:spcBef>
+                <a:spcPts val="500"/>
+              </a:spcBef>
+              <a:buFont typeface="Arial" panose="020B0604020202020204" pitchFamily="34" charset="0"/>
+              <a:buNone/>
+              <a:defRPr sz="1600" b="1" kern="1200">
+                <a:solidFill>
+                  <a:schemeClr val="tx1"/>
+                </a:solidFill>
+                <a:latin typeface="+mn-lt"/>
+                <a:ea typeface="+mn-ea"/>
+                <a:cs typeface="+mn-cs"/>
+              </a:defRPr>
+            </a:lvl8pPr>
+            <a:lvl9pPr marL="3657600" indent="0" algn="l" defTabSz="914400" rtl="0" eaLnBrk="1" latinLnBrk="0" hangingPunct="1">
+              <a:lnSpc>
+                <a:spcPct val="90000"/>
+              </a:lnSpc>
+              <a:spcBef>
+                <a:spcPts val="500"/>
+              </a:spcBef>
+              <a:buFont typeface="Arial" panose="020B0604020202020204" pitchFamily="34" charset="0"/>
+              <a:buNone/>
+              <a:defRPr sz="1600" b="1" kern="1200">
+                <a:solidFill>
+                  <a:schemeClr val="tx1"/>
+                </a:solidFill>
+                <a:latin typeface="+mn-lt"/>
+                <a:ea typeface="+mn-ea"/>
+                <a:cs typeface="+mn-cs"/>
+              </a:defRPr>
+            </a:lvl9pPr>
+          </a:lstStyle>
           <a:p>
             <a:r>
               <a:rPr lang="de-DE" dirty="0"/>
-              <a:t>Performance</a:t>
+              <a:t>Clustering</a:t>
             </a:r>
             <a:endParaRPr lang="LID4096" dirty="0"/>
           </a:p>
@@ -4973,194 +5275,860 @@
       </p:sp>
       <p:sp>
         <p:nvSpPr>
-          <p:cNvPr id="4" name="Content Placeholder 3">
-            <a:extLst>
-              <a:ext uri="{FF2B5EF4-FFF2-40B4-BE49-F238E27FC236}">
-                <a16:creationId xmlns:a16="http://schemas.microsoft.com/office/drawing/2014/main" id="{BB03BFB5-F71E-8736-01FC-81DB10BC7EF8}"/>
-              </a:ext>
-            </a:extLst>
-          </p:cNvPr>
-          <p:cNvSpPr>
-            <a:spLocks noGrp="1"/>
-          </p:cNvSpPr>
-          <p:nvPr>
-            <p:ph sz="half" idx="2"/>
-          </p:nvPr>
-        </p:nvSpPr>
-        <p:spPr/>
-        <p:txBody>
-          <a:bodyPr/>
-          <a:lstStyle/>
+          <p:cNvPr id="11" name="Content Placeholder 3">
+            <a:extLst>
+              <a:ext uri="{FF2B5EF4-FFF2-40B4-BE49-F238E27FC236}">
+                <a16:creationId xmlns:a16="http://schemas.microsoft.com/office/drawing/2014/main" id="{39444847-29A5-3545-6D44-BA49F493CB7E}"/>
+              </a:ext>
+            </a:extLst>
+          </p:cNvPr>
+          <p:cNvSpPr txBox="1">
+            <a:spLocks/>
+          </p:cNvSpPr>
+          <p:nvPr/>
+        </p:nvSpPr>
+        <p:spPr>
+          <a:xfrm>
+            <a:off x="4144929" y="2505075"/>
+            <a:ext cx="3612331" cy="3684588"/>
+          </a:xfrm>
+          <a:prstGeom prst="rect">
+            <a:avLst/>
+          </a:prstGeom>
+        </p:spPr>
+        <p:txBody>
+          <a:bodyPr vert="horz" lIns="91440" tIns="45720" rIns="91440" bIns="45720" rtlCol="0">
+            <a:normAutofit/>
+          </a:bodyPr>
+          <a:lstStyle>
+            <a:lvl1pPr marL="228600" indent="-228600" algn="l" defTabSz="914400" rtl="0" eaLnBrk="1" latinLnBrk="0" hangingPunct="1">
+              <a:lnSpc>
+                <a:spcPct val="90000"/>
+              </a:lnSpc>
+              <a:spcBef>
+                <a:spcPts val="1000"/>
+              </a:spcBef>
+              <a:buFont typeface="Arial" panose="020B0604020202020204" pitchFamily="34" charset="0"/>
+              <a:buChar char="•"/>
+              <a:defRPr sz="2800" kern="1200">
+                <a:solidFill>
+                  <a:schemeClr val="tx1"/>
+                </a:solidFill>
+                <a:latin typeface="+mn-lt"/>
+                <a:ea typeface="+mn-ea"/>
+                <a:cs typeface="+mn-cs"/>
+              </a:defRPr>
+            </a:lvl1pPr>
+            <a:lvl2pPr marL="685800" indent="-228600" algn="l" defTabSz="914400" rtl="0" eaLnBrk="1" latinLnBrk="0" hangingPunct="1">
+              <a:lnSpc>
+                <a:spcPct val="90000"/>
+              </a:lnSpc>
+              <a:spcBef>
+                <a:spcPts val="500"/>
+              </a:spcBef>
+              <a:buFont typeface="Arial" panose="020B0604020202020204" pitchFamily="34" charset="0"/>
+              <a:buChar char="•"/>
+              <a:defRPr sz="2400" kern="1200">
+                <a:solidFill>
+                  <a:schemeClr val="tx1"/>
+                </a:solidFill>
+                <a:latin typeface="+mn-lt"/>
+                <a:ea typeface="+mn-ea"/>
+                <a:cs typeface="+mn-cs"/>
+              </a:defRPr>
+            </a:lvl2pPr>
+            <a:lvl3pPr marL="1143000" indent="-228600" algn="l" defTabSz="914400" rtl="0" eaLnBrk="1" latinLnBrk="0" hangingPunct="1">
+              <a:lnSpc>
+                <a:spcPct val="90000"/>
+              </a:lnSpc>
+              <a:spcBef>
+                <a:spcPts val="500"/>
+              </a:spcBef>
+              <a:buFont typeface="Arial" panose="020B0604020202020204" pitchFamily="34" charset="0"/>
+              <a:buChar char="•"/>
+              <a:defRPr sz="2000" kern="1200">
+                <a:solidFill>
+                  <a:schemeClr val="tx1"/>
+                </a:solidFill>
+                <a:latin typeface="+mn-lt"/>
+                <a:ea typeface="+mn-ea"/>
+                <a:cs typeface="+mn-cs"/>
+              </a:defRPr>
+            </a:lvl3pPr>
+            <a:lvl4pPr marL="1600200" indent="-228600" algn="l" defTabSz="914400" rtl="0" eaLnBrk="1" latinLnBrk="0" hangingPunct="1">
+              <a:lnSpc>
+                <a:spcPct val="90000"/>
+              </a:lnSpc>
+              <a:spcBef>
+                <a:spcPts val="500"/>
+              </a:spcBef>
+              <a:buFont typeface="Arial" panose="020B0604020202020204" pitchFamily="34" charset="0"/>
+              <a:buChar char="•"/>
+              <a:defRPr sz="1800" kern="1200">
+                <a:solidFill>
+                  <a:schemeClr val="tx1"/>
+                </a:solidFill>
+                <a:latin typeface="+mn-lt"/>
+                <a:ea typeface="+mn-ea"/>
+                <a:cs typeface="+mn-cs"/>
+              </a:defRPr>
+            </a:lvl4pPr>
+            <a:lvl5pPr marL="2057400" indent="-228600" algn="l" defTabSz="914400" rtl="0" eaLnBrk="1" latinLnBrk="0" hangingPunct="1">
+              <a:lnSpc>
+                <a:spcPct val="90000"/>
+              </a:lnSpc>
+              <a:spcBef>
+                <a:spcPts val="500"/>
+              </a:spcBef>
+              <a:buFont typeface="Arial" panose="020B0604020202020204" pitchFamily="34" charset="0"/>
+              <a:buChar char="•"/>
+              <a:defRPr sz="1800" kern="1200">
+                <a:solidFill>
+                  <a:schemeClr val="tx1"/>
+                </a:solidFill>
+                <a:latin typeface="+mn-lt"/>
+                <a:ea typeface="+mn-ea"/>
+                <a:cs typeface="+mn-cs"/>
+              </a:defRPr>
+            </a:lvl5pPr>
+            <a:lvl6pPr marL="2514600" indent="-228600" algn="l" defTabSz="914400" rtl="0" eaLnBrk="1" latinLnBrk="0" hangingPunct="1">
+              <a:lnSpc>
+                <a:spcPct val="90000"/>
+              </a:lnSpc>
+              <a:spcBef>
+                <a:spcPts val="500"/>
+              </a:spcBef>
+              <a:buFont typeface="Arial" panose="020B0604020202020204" pitchFamily="34" charset="0"/>
+              <a:buChar char="•"/>
+              <a:defRPr sz="1800" kern="1200">
+                <a:solidFill>
+                  <a:schemeClr val="tx1"/>
+                </a:solidFill>
+                <a:latin typeface="+mn-lt"/>
+                <a:ea typeface="+mn-ea"/>
+                <a:cs typeface="+mn-cs"/>
+              </a:defRPr>
+            </a:lvl6pPr>
+            <a:lvl7pPr marL="2971800" indent="-228600" algn="l" defTabSz="914400" rtl="0" eaLnBrk="1" latinLnBrk="0" hangingPunct="1">
+              <a:lnSpc>
+                <a:spcPct val="90000"/>
+              </a:lnSpc>
+              <a:spcBef>
+                <a:spcPts val="500"/>
+              </a:spcBef>
+              <a:buFont typeface="Arial" panose="020B0604020202020204" pitchFamily="34" charset="0"/>
+              <a:buChar char="•"/>
+              <a:defRPr sz="1800" kern="1200">
+                <a:solidFill>
+                  <a:schemeClr val="tx1"/>
+                </a:solidFill>
+                <a:latin typeface="+mn-lt"/>
+                <a:ea typeface="+mn-ea"/>
+                <a:cs typeface="+mn-cs"/>
+              </a:defRPr>
+            </a:lvl7pPr>
+            <a:lvl8pPr marL="3429000" indent="-228600" algn="l" defTabSz="914400" rtl="0" eaLnBrk="1" latinLnBrk="0" hangingPunct="1">
+              <a:lnSpc>
+                <a:spcPct val="90000"/>
+              </a:lnSpc>
+              <a:spcBef>
+                <a:spcPts val="500"/>
+              </a:spcBef>
+              <a:buFont typeface="Arial" panose="020B0604020202020204" pitchFamily="34" charset="0"/>
+              <a:buChar char="•"/>
+              <a:defRPr sz="1800" kern="1200">
+                <a:solidFill>
+                  <a:schemeClr val="tx1"/>
+                </a:solidFill>
+                <a:latin typeface="+mn-lt"/>
+                <a:ea typeface="+mn-ea"/>
+                <a:cs typeface="+mn-cs"/>
+              </a:defRPr>
+            </a:lvl8pPr>
+            <a:lvl9pPr marL="3886200" indent="-228600" algn="l" defTabSz="914400" rtl="0" eaLnBrk="1" latinLnBrk="0" hangingPunct="1">
+              <a:lnSpc>
+                <a:spcPct val="90000"/>
+              </a:lnSpc>
+              <a:spcBef>
+                <a:spcPts val="500"/>
+              </a:spcBef>
+              <a:buFont typeface="Arial" panose="020B0604020202020204" pitchFamily="34" charset="0"/>
+              <a:buChar char="•"/>
+              <a:defRPr sz="1800" kern="1200">
+                <a:solidFill>
+                  <a:schemeClr val="tx1"/>
+                </a:solidFill>
+                <a:latin typeface="+mn-lt"/>
+                <a:ea typeface="+mn-ea"/>
+                <a:cs typeface="+mn-cs"/>
+              </a:defRPr>
+            </a:lvl9pPr>
+          </a:lstStyle>
+          <a:p>
+            <a:r>
+              <a:rPr lang="en-US" sz="2400" dirty="0"/>
+              <a:t>Random Forest </a:t>
+            </a:r>
+          </a:p>
+          <a:p>
+            <a:endParaRPr lang="en-US" sz="2400" dirty="0"/>
+          </a:p>
+          <a:p>
+            <a:r>
+              <a:rPr lang="de-DE" sz="2400" dirty="0" err="1"/>
+              <a:t>Convincing</a:t>
+            </a:r>
+            <a:endParaRPr lang="de-DE" sz="2400" dirty="0"/>
+          </a:p>
+          <a:p>
+            <a:endParaRPr lang="de-DE" sz="2400" dirty="0"/>
+          </a:p>
+          <a:p>
+            <a:r>
+              <a:rPr lang="de-DE" sz="2400" dirty="0" err="1"/>
+              <a:t>Accuracy</a:t>
+            </a:r>
+            <a:r>
+              <a:rPr lang="de-DE" sz="2400" dirty="0"/>
+              <a:t>…</a:t>
+            </a:r>
+            <a:endParaRPr lang="LID4096" sz="2400" dirty="0"/>
+          </a:p>
+          <a:p>
+            <a:endParaRPr lang="LID4096" sz="2400" dirty="0"/>
+          </a:p>
+        </p:txBody>
+      </p:sp>
+      <p:sp>
+        <p:nvSpPr>
+          <p:cNvPr id="12" name="Content Placeholder 3">
+            <a:extLst>
+              <a:ext uri="{FF2B5EF4-FFF2-40B4-BE49-F238E27FC236}">
+                <a16:creationId xmlns:a16="http://schemas.microsoft.com/office/drawing/2014/main" id="{2B875957-DB37-6588-57BD-FB0A51F0FA83}"/>
+              </a:ext>
+            </a:extLst>
+          </p:cNvPr>
+          <p:cNvSpPr txBox="1">
+            <a:spLocks/>
+          </p:cNvSpPr>
+          <p:nvPr/>
+        </p:nvSpPr>
+        <p:spPr>
+          <a:xfrm>
+            <a:off x="7658019" y="2514363"/>
+            <a:ext cx="3694192" cy="3684588"/>
+          </a:xfrm>
+          <a:prstGeom prst="rect">
+            <a:avLst/>
+          </a:prstGeom>
+        </p:spPr>
+        <p:txBody>
+          <a:bodyPr vert="horz" lIns="91440" tIns="45720" rIns="91440" bIns="45720" rtlCol="0">
+            <a:normAutofit/>
+          </a:bodyPr>
+          <a:lstStyle>
+            <a:lvl1pPr marL="228600" indent="-228600" algn="l" defTabSz="914400" rtl="0" eaLnBrk="1" latinLnBrk="0" hangingPunct="1">
+              <a:lnSpc>
+                <a:spcPct val="90000"/>
+              </a:lnSpc>
+              <a:spcBef>
+                <a:spcPts val="1000"/>
+              </a:spcBef>
+              <a:buFont typeface="Arial" panose="020B0604020202020204" pitchFamily="34" charset="0"/>
+              <a:buChar char="•"/>
+              <a:defRPr sz="2800" kern="1200">
+                <a:solidFill>
+                  <a:schemeClr val="tx1"/>
+                </a:solidFill>
+                <a:latin typeface="+mn-lt"/>
+                <a:ea typeface="+mn-ea"/>
+                <a:cs typeface="+mn-cs"/>
+              </a:defRPr>
+            </a:lvl1pPr>
+            <a:lvl2pPr marL="685800" indent="-228600" algn="l" defTabSz="914400" rtl="0" eaLnBrk="1" latinLnBrk="0" hangingPunct="1">
+              <a:lnSpc>
+                <a:spcPct val="90000"/>
+              </a:lnSpc>
+              <a:spcBef>
+                <a:spcPts val="500"/>
+              </a:spcBef>
+              <a:buFont typeface="Arial" panose="020B0604020202020204" pitchFamily="34" charset="0"/>
+              <a:buChar char="•"/>
+              <a:defRPr sz="2400" kern="1200">
+                <a:solidFill>
+                  <a:schemeClr val="tx1"/>
+                </a:solidFill>
+                <a:latin typeface="+mn-lt"/>
+                <a:ea typeface="+mn-ea"/>
+                <a:cs typeface="+mn-cs"/>
+              </a:defRPr>
+            </a:lvl2pPr>
+            <a:lvl3pPr marL="1143000" indent="-228600" algn="l" defTabSz="914400" rtl="0" eaLnBrk="1" latinLnBrk="0" hangingPunct="1">
+              <a:lnSpc>
+                <a:spcPct val="90000"/>
+              </a:lnSpc>
+              <a:spcBef>
+                <a:spcPts val="500"/>
+              </a:spcBef>
+              <a:buFont typeface="Arial" panose="020B0604020202020204" pitchFamily="34" charset="0"/>
+              <a:buChar char="•"/>
+              <a:defRPr sz="2000" kern="1200">
+                <a:solidFill>
+                  <a:schemeClr val="tx1"/>
+                </a:solidFill>
+                <a:latin typeface="+mn-lt"/>
+                <a:ea typeface="+mn-ea"/>
+                <a:cs typeface="+mn-cs"/>
+              </a:defRPr>
+            </a:lvl3pPr>
+            <a:lvl4pPr marL="1600200" indent="-228600" algn="l" defTabSz="914400" rtl="0" eaLnBrk="1" latinLnBrk="0" hangingPunct="1">
+              <a:lnSpc>
+                <a:spcPct val="90000"/>
+              </a:lnSpc>
+              <a:spcBef>
+                <a:spcPts val="500"/>
+              </a:spcBef>
+              <a:buFont typeface="Arial" panose="020B0604020202020204" pitchFamily="34" charset="0"/>
+              <a:buChar char="•"/>
+              <a:defRPr sz="1800" kern="1200">
+                <a:solidFill>
+                  <a:schemeClr val="tx1"/>
+                </a:solidFill>
+                <a:latin typeface="+mn-lt"/>
+                <a:ea typeface="+mn-ea"/>
+                <a:cs typeface="+mn-cs"/>
+              </a:defRPr>
+            </a:lvl4pPr>
+            <a:lvl5pPr marL="2057400" indent="-228600" algn="l" defTabSz="914400" rtl="0" eaLnBrk="1" latinLnBrk="0" hangingPunct="1">
+              <a:lnSpc>
+                <a:spcPct val="90000"/>
+              </a:lnSpc>
+              <a:spcBef>
+                <a:spcPts val="500"/>
+              </a:spcBef>
+              <a:buFont typeface="Arial" panose="020B0604020202020204" pitchFamily="34" charset="0"/>
+              <a:buChar char="•"/>
+              <a:defRPr sz="1800" kern="1200">
+                <a:solidFill>
+                  <a:schemeClr val="tx1"/>
+                </a:solidFill>
+                <a:latin typeface="+mn-lt"/>
+                <a:ea typeface="+mn-ea"/>
+                <a:cs typeface="+mn-cs"/>
+              </a:defRPr>
+            </a:lvl5pPr>
+            <a:lvl6pPr marL="2514600" indent="-228600" algn="l" defTabSz="914400" rtl="0" eaLnBrk="1" latinLnBrk="0" hangingPunct="1">
+              <a:lnSpc>
+                <a:spcPct val="90000"/>
+              </a:lnSpc>
+              <a:spcBef>
+                <a:spcPts val="500"/>
+              </a:spcBef>
+              <a:buFont typeface="Arial" panose="020B0604020202020204" pitchFamily="34" charset="0"/>
+              <a:buChar char="•"/>
+              <a:defRPr sz="1800" kern="1200">
+                <a:solidFill>
+                  <a:schemeClr val="tx1"/>
+                </a:solidFill>
+                <a:latin typeface="+mn-lt"/>
+                <a:ea typeface="+mn-ea"/>
+                <a:cs typeface="+mn-cs"/>
+              </a:defRPr>
+            </a:lvl6pPr>
+            <a:lvl7pPr marL="2971800" indent="-228600" algn="l" defTabSz="914400" rtl="0" eaLnBrk="1" latinLnBrk="0" hangingPunct="1">
+              <a:lnSpc>
+                <a:spcPct val="90000"/>
+              </a:lnSpc>
+              <a:spcBef>
+                <a:spcPts val="500"/>
+              </a:spcBef>
+              <a:buFont typeface="Arial" panose="020B0604020202020204" pitchFamily="34" charset="0"/>
+              <a:buChar char="•"/>
+              <a:defRPr sz="1800" kern="1200">
+                <a:solidFill>
+                  <a:schemeClr val="tx1"/>
+                </a:solidFill>
+                <a:latin typeface="+mn-lt"/>
+                <a:ea typeface="+mn-ea"/>
+                <a:cs typeface="+mn-cs"/>
+              </a:defRPr>
+            </a:lvl7pPr>
+            <a:lvl8pPr marL="3429000" indent="-228600" algn="l" defTabSz="914400" rtl="0" eaLnBrk="1" latinLnBrk="0" hangingPunct="1">
+              <a:lnSpc>
+                <a:spcPct val="90000"/>
+              </a:lnSpc>
+              <a:spcBef>
+                <a:spcPts val="500"/>
+              </a:spcBef>
+              <a:buFont typeface="Arial" panose="020B0604020202020204" pitchFamily="34" charset="0"/>
+              <a:buChar char="•"/>
+              <a:defRPr sz="1800" kern="1200">
+                <a:solidFill>
+                  <a:schemeClr val="tx1"/>
+                </a:solidFill>
+                <a:latin typeface="+mn-lt"/>
+                <a:ea typeface="+mn-ea"/>
+                <a:cs typeface="+mn-cs"/>
+              </a:defRPr>
+            </a:lvl8pPr>
+            <a:lvl9pPr marL="3886200" indent="-228600" algn="l" defTabSz="914400" rtl="0" eaLnBrk="1" latinLnBrk="0" hangingPunct="1">
+              <a:lnSpc>
+                <a:spcPct val="90000"/>
+              </a:lnSpc>
+              <a:spcBef>
+                <a:spcPts val="500"/>
+              </a:spcBef>
+              <a:buFont typeface="Arial" panose="020B0604020202020204" pitchFamily="34" charset="0"/>
+              <a:buChar char="•"/>
+              <a:defRPr sz="1800" kern="1200">
+                <a:solidFill>
+                  <a:schemeClr val="tx1"/>
+                </a:solidFill>
+                <a:latin typeface="+mn-lt"/>
+                <a:ea typeface="+mn-ea"/>
+                <a:cs typeface="+mn-cs"/>
+              </a:defRPr>
+            </a:lvl9pPr>
+          </a:lstStyle>
+          <a:p>
+            <a:r>
+              <a:rPr lang="de-DE" sz="2400" dirty="0"/>
+              <a:t>Random </a:t>
+            </a:r>
+            <a:r>
+              <a:rPr lang="de-DE" sz="2400" dirty="0" err="1"/>
+              <a:t>Hierarchical</a:t>
+            </a:r>
+            <a:r>
+              <a:rPr lang="de-DE" sz="2400" dirty="0"/>
+              <a:t> </a:t>
+            </a:r>
+          </a:p>
+          <a:p>
+            <a:endParaRPr lang="de-DE" sz="2400" dirty="0"/>
+          </a:p>
+          <a:p>
+            <a:r>
+              <a:rPr lang="de-DE" sz="2400" dirty="0"/>
+              <a:t>Very </a:t>
+            </a:r>
+            <a:r>
+              <a:rPr lang="de-DE" sz="2400" dirty="0" err="1"/>
+              <a:t>convincing</a:t>
+            </a:r>
+            <a:endParaRPr lang="de-DE" sz="2400" dirty="0"/>
+          </a:p>
+          <a:p>
+            <a:endParaRPr lang="de-DE" sz="2400" dirty="0"/>
+          </a:p>
+          <a:p>
+            <a:r>
+              <a:rPr lang="de-DE" sz="2400" dirty="0"/>
+              <a:t>High score</a:t>
+            </a:r>
+            <a:endParaRPr lang="LID4096" sz="2400" dirty="0"/>
+          </a:p>
+          <a:p>
+            <a:endParaRPr lang="LID4096" sz="2400" dirty="0"/>
+          </a:p>
+        </p:txBody>
+      </p:sp>
+      <p:sp>
+        <p:nvSpPr>
+          <p:cNvPr id="15" name="Text Placeholder 4">
+            <a:extLst>
+              <a:ext uri="{FF2B5EF4-FFF2-40B4-BE49-F238E27FC236}">
+                <a16:creationId xmlns:a16="http://schemas.microsoft.com/office/drawing/2014/main" id="{EA708B27-1F9D-D735-6405-9EDF4C2E7EF4}"/>
+              </a:ext>
+            </a:extLst>
+          </p:cNvPr>
+          <p:cNvSpPr txBox="1">
+            <a:spLocks/>
+          </p:cNvSpPr>
+          <p:nvPr/>
+        </p:nvSpPr>
+        <p:spPr>
+          <a:xfrm>
+            <a:off x="4181301" y="1694442"/>
+            <a:ext cx="3479894" cy="823912"/>
+          </a:xfrm>
+          <a:prstGeom prst="rect">
+            <a:avLst/>
+          </a:prstGeom>
+        </p:spPr>
+        <p:txBody>
+          <a:bodyPr vert="horz" lIns="91440" tIns="45720" rIns="91440" bIns="45720" rtlCol="0" anchor="b">
+            <a:normAutofit/>
+          </a:bodyPr>
+          <a:lstStyle>
+            <a:lvl1pPr marL="0" indent="0" algn="l" defTabSz="914400" rtl="0" eaLnBrk="1" latinLnBrk="0" hangingPunct="1">
+              <a:lnSpc>
+                <a:spcPct val="90000"/>
+              </a:lnSpc>
+              <a:spcBef>
+                <a:spcPts val="1000"/>
+              </a:spcBef>
+              <a:buFont typeface="Arial" panose="020B0604020202020204" pitchFamily="34" charset="0"/>
+              <a:buNone/>
+              <a:defRPr sz="2400" b="1" kern="1200">
+                <a:solidFill>
+                  <a:schemeClr val="tx1"/>
+                </a:solidFill>
+                <a:latin typeface="+mn-lt"/>
+                <a:ea typeface="+mn-ea"/>
+                <a:cs typeface="+mn-cs"/>
+              </a:defRPr>
+            </a:lvl1pPr>
+            <a:lvl2pPr marL="457200" indent="0" algn="l" defTabSz="914400" rtl="0" eaLnBrk="1" latinLnBrk="0" hangingPunct="1">
+              <a:lnSpc>
+                <a:spcPct val="90000"/>
+              </a:lnSpc>
+              <a:spcBef>
+                <a:spcPts val="500"/>
+              </a:spcBef>
+              <a:buFont typeface="Arial" panose="020B0604020202020204" pitchFamily="34" charset="0"/>
+              <a:buNone/>
+              <a:defRPr sz="2000" b="1" kern="1200">
+                <a:solidFill>
+                  <a:schemeClr val="tx1"/>
+                </a:solidFill>
+                <a:latin typeface="+mn-lt"/>
+                <a:ea typeface="+mn-ea"/>
+                <a:cs typeface="+mn-cs"/>
+              </a:defRPr>
+            </a:lvl2pPr>
+            <a:lvl3pPr marL="914400" indent="0" algn="l" defTabSz="914400" rtl="0" eaLnBrk="1" latinLnBrk="0" hangingPunct="1">
+              <a:lnSpc>
+                <a:spcPct val="90000"/>
+              </a:lnSpc>
+              <a:spcBef>
+                <a:spcPts val="500"/>
+              </a:spcBef>
+              <a:buFont typeface="Arial" panose="020B0604020202020204" pitchFamily="34" charset="0"/>
+              <a:buNone/>
+              <a:defRPr sz="1800" b="1" kern="1200">
+                <a:solidFill>
+                  <a:schemeClr val="tx1"/>
+                </a:solidFill>
+                <a:latin typeface="+mn-lt"/>
+                <a:ea typeface="+mn-ea"/>
+                <a:cs typeface="+mn-cs"/>
+              </a:defRPr>
+            </a:lvl3pPr>
+            <a:lvl4pPr marL="1371600" indent="0" algn="l" defTabSz="914400" rtl="0" eaLnBrk="1" latinLnBrk="0" hangingPunct="1">
+              <a:lnSpc>
+                <a:spcPct val="90000"/>
+              </a:lnSpc>
+              <a:spcBef>
+                <a:spcPts val="500"/>
+              </a:spcBef>
+              <a:buFont typeface="Arial" panose="020B0604020202020204" pitchFamily="34" charset="0"/>
+              <a:buNone/>
+              <a:defRPr sz="1600" b="1" kern="1200">
+                <a:solidFill>
+                  <a:schemeClr val="tx1"/>
+                </a:solidFill>
+                <a:latin typeface="+mn-lt"/>
+                <a:ea typeface="+mn-ea"/>
+                <a:cs typeface="+mn-cs"/>
+              </a:defRPr>
+            </a:lvl4pPr>
+            <a:lvl5pPr marL="1828800" indent="0" algn="l" defTabSz="914400" rtl="0" eaLnBrk="1" latinLnBrk="0" hangingPunct="1">
+              <a:lnSpc>
+                <a:spcPct val="90000"/>
+              </a:lnSpc>
+              <a:spcBef>
+                <a:spcPts val="500"/>
+              </a:spcBef>
+              <a:buFont typeface="Arial" panose="020B0604020202020204" pitchFamily="34" charset="0"/>
+              <a:buNone/>
+              <a:defRPr sz="1600" b="1" kern="1200">
+                <a:solidFill>
+                  <a:schemeClr val="tx1"/>
+                </a:solidFill>
+                <a:latin typeface="+mn-lt"/>
+                <a:ea typeface="+mn-ea"/>
+                <a:cs typeface="+mn-cs"/>
+              </a:defRPr>
+            </a:lvl5pPr>
+            <a:lvl6pPr marL="2286000" indent="0" algn="l" defTabSz="914400" rtl="0" eaLnBrk="1" latinLnBrk="0" hangingPunct="1">
+              <a:lnSpc>
+                <a:spcPct val="90000"/>
+              </a:lnSpc>
+              <a:spcBef>
+                <a:spcPts val="500"/>
+              </a:spcBef>
+              <a:buFont typeface="Arial" panose="020B0604020202020204" pitchFamily="34" charset="0"/>
+              <a:buNone/>
+              <a:defRPr sz="1600" b="1" kern="1200">
+                <a:solidFill>
+                  <a:schemeClr val="tx1"/>
+                </a:solidFill>
+                <a:latin typeface="+mn-lt"/>
+                <a:ea typeface="+mn-ea"/>
+                <a:cs typeface="+mn-cs"/>
+              </a:defRPr>
+            </a:lvl6pPr>
+            <a:lvl7pPr marL="2743200" indent="0" algn="l" defTabSz="914400" rtl="0" eaLnBrk="1" latinLnBrk="0" hangingPunct="1">
+              <a:lnSpc>
+                <a:spcPct val="90000"/>
+              </a:lnSpc>
+              <a:spcBef>
+                <a:spcPts val="500"/>
+              </a:spcBef>
+              <a:buFont typeface="Arial" panose="020B0604020202020204" pitchFamily="34" charset="0"/>
+              <a:buNone/>
+              <a:defRPr sz="1600" b="1" kern="1200">
+                <a:solidFill>
+                  <a:schemeClr val="tx1"/>
+                </a:solidFill>
+                <a:latin typeface="+mn-lt"/>
+                <a:ea typeface="+mn-ea"/>
+                <a:cs typeface="+mn-cs"/>
+              </a:defRPr>
+            </a:lvl7pPr>
+            <a:lvl8pPr marL="3200400" indent="0" algn="l" defTabSz="914400" rtl="0" eaLnBrk="1" latinLnBrk="0" hangingPunct="1">
+              <a:lnSpc>
+                <a:spcPct val="90000"/>
+              </a:lnSpc>
+              <a:spcBef>
+                <a:spcPts val="500"/>
+              </a:spcBef>
+              <a:buFont typeface="Arial" panose="020B0604020202020204" pitchFamily="34" charset="0"/>
+              <a:buNone/>
+              <a:defRPr sz="1600" b="1" kern="1200">
+                <a:solidFill>
+                  <a:schemeClr val="tx1"/>
+                </a:solidFill>
+                <a:latin typeface="+mn-lt"/>
+                <a:ea typeface="+mn-ea"/>
+                <a:cs typeface="+mn-cs"/>
+              </a:defRPr>
+            </a:lvl8pPr>
+            <a:lvl9pPr marL="3657600" indent="0" algn="l" defTabSz="914400" rtl="0" eaLnBrk="1" latinLnBrk="0" hangingPunct="1">
+              <a:lnSpc>
+                <a:spcPct val="90000"/>
+              </a:lnSpc>
+              <a:spcBef>
+                <a:spcPts val="500"/>
+              </a:spcBef>
+              <a:buFont typeface="Arial" panose="020B0604020202020204" pitchFamily="34" charset="0"/>
+              <a:buNone/>
+              <a:defRPr sz="1600" b="1" kern="1200">
+                <a:solidFill>
+                  <a:schemeClr val="tx1"/>
+                </a:solidFill>
+                <a:latin typeface="+mn-lt"/>
+                <a:ea typeface="+mn-ea"/>
+                <a:cs typeface="+mn-cs"/>
+              </a:defRPr>
+            </a:lvl9pPr>
+          </a:lstStyle>
           <a:p>
             <a:r>
               <a:rPr lang="de-DE" dirty="0"/>
-              <a:t>Talk </a:t>
-            </a:r>
-            <a:r>
-              <a:rPr lang="de-DE" dirty="0" err="1"/>
-              <a:t>about</a:t>
-            </a:r>
+              <a:t>Classification</a:t>
+            </a:r>
+            <a:endParaRPr lang="LID4096" dirty="0"/>
+          </a:p>
+        </p:txBody>
+      </p:sp>
+      <p:sp>
+        <p:nvSpPr>
+          <p:cNvPr id="16" name="Text Placeholder 4">
+            <a:extLst>
+              <a:ext uri="{FF2B5EF4-FFF2-40B4-BE49-F238E27FC236}">
+                <a16:creationId xmlns:a16="http://schemas.microsoft.com/office/drawing/2014/main" id="{BC92219E-A2EA-FE28-2507-FADF43268593}"/>
+              </a:ext>
+            </a:extLst>
+          </p:cNvPr>
+          <p:cNvSpPr txBox="1">
+            <a:spLocks/>
+          </p:cNvSpPr>
+          <p:nvPr/>
+        </p:nvSpPr>
+        <p:spPr>
+          <a:xfrm>
+            <a:off x="869056" y="1694442"/>
+            <a:ext cx="3479894" cy="823912"/>
+          </a:xfrm>
+          <a:prstGeom prst="rect">
+            <a:avLst/>
+          </a:prstGeom>
+        </p:spPr>
+        <p:txBody>
+          <a:bodyPr vert="horz" lIns="91440" tIns="45720" rIns="91440" bIns="45720" rtlCol="0" anchor="b">
+            <a:normAutofit/>
+          </a:bodyPr>
+          <a:lstStyle>
+            <a:lvl1pPr marL="0" indent="0" algn="l" defTabSz="914400" rtl="0" eaLnBrk="1" latinLnBrk="0" hangingPunct="1">
+              <a:lnSpc>
+                <a:spcPct val="90000"/>
+              </a:lnSpc>
+              <a:spcBef>
+                <a:spcPts val="1000"/>
+              </a:spcBef>
+              <a:buFont typeface="Arial" panose="020B0604020202020204" pitchFamily="34" charset="0"/>
+              <a:buNone/>
+              <a:defRPr sz="2400" b="1" kern="1200">
+                <a:solidFill>
+                  <a:schemeClr val="tx1"/>
+                </a:solidFill>
+                <a:latin typeface="+mn-lt"/>
+                <a:ea typeface="+mn-ea"/>
+                <a:cs typeface="+mn-cs"/>
+              </a:defRPr>
+            </a:lvl1pPr>
+            <a:lvl2pPr marL="457200" indent="0" algn="l" defTabSz="914400" rtl="0" eaLnBrk="1" latinLnBrk="0" hangingPunct="1">
+              <a:lnSpc>
+                <a:spcPct val="90000"/>
+              </a:lnSpc>
+              <a:spcBef>
+                <a:spcPts val="500"/>
+              </a:spcBef>
+              <a:buFont typeface="Arial" panose="020B0604020202020204" pitchFamily="34" charset="0"/>
+              <a:buNone/>
+              <a:defRPr sz="2000" b="1" kern="1200">
+                <a:solidFill>
+                  <a:schemeClr val="tx1"/>
+                </a:solidFill>
+                <a:latin typeface="+mn-lt"/>
+                <a:ea typeface="+mn-ea"/>
+                <a:cs typeface="+mn-cs"/>
+              </a:defRPr>
+            </a:lvl2pPr>
+            <a:lvl3pPr marL="914400" indent="0" algn="l" defTabSz="914400" rtl="0" eaLnBrk="1" latinLnBrk="0" hangingPunct="1">
+              <a:lnSpc>
+                <a:spcPct val="90000"/>
+              </a:lnSpc>
+              <a:spcBef>
+                <a:spcPts val="500"/>
+              </a:spcBef>
+              <a:buFont typeface="Arial" panose="020B0604020202020204" pitchFamily="34" charset="0"/>
+              <a:buNone/>
+              <a:defRPr sz="1800" b="1" kern="1200">
+                <a:solidFill>
+                  <a:schemeClr val="tx1"/>
+                </a:solidFill>
+                <a:latin typeface="+mn-lt"/>
+                <a:ea typeface="+mn-ea"/>
+                <a:cs typeface="+mn-cs"/>
+              </a:defRPr>
+            </a:lvl3pPr>
+            <a:lvl4pPr marL="1371600" indent="0" algn="l" defTabSz="914400" rtl="0" eaLnBrk="1" latinLnBrk="0" hangingPunct="1">
+              <a:lnSpc>
+                <a:spcPct val="90000"/>
+              </a:lnSpc>
+              <a:spcBef>
+                <a:spcPts val="500"/>
+              </a:spcBef>
+              <a:buFont typeface="Arial" panose="020B0604020202020204" pitchFamily="34" charset="0"/>
+              <a:buNone/>
+              <a:defRPr sz="1600" b="1" kern="1200">
+                <a:solidFill>
+                  <a:schemeClr val="tx1"/>
+                </a:solidFill>
+                <a:latin typeface="+mn-lt"/>
+                <a:ea typeface="+mn-ea"/>
+                <a:cs typeface="+mn-cs"/>
+              </a:defRPr>
+            </a:lvl4pPr>
+            <a:lvl5pPr marL="1828800" indent="0" algn="l" defTabSz="914400" rtl="0" eaLnBrk="1" latinLnBrk="0" hangingPunct="1">
+              <a:lnSpc>
+                <a:spcPct val="90000"/>
+              </a:lnSpc>
+              <a:spcBef>
+                <a:spcPts val="500"/>
+              </a:spcBef>
+              <a:buFont typeface="Arial" panose="020B0604020202020204" pitchFamily="34" charset="0"/>
+              <a:buNone/>
+              <a:defRPr sz="1600" b="1" kern="1200">
+                <a:solidFill>
+                  <a:schemeClr val="tx1"/>
+                </a:solidFill>
+                <a:latin typeface="+mn-lt"/>
+                <a:ea typeface="+mn-ea"/>
+                <a:cs typeface="+mn-cs"/>
+              </a:defRPr>
+            </a:lvl5pPr>
+            <a:lvl6pPr marL="2286000" indent="0" algn="l" defTabSz="914400" rtl="0" eaLnBrk="1" latinLnBrk="0" hangingPunct="1">
+              <a:lnSpc>
+                <a:spcPct val="90000"/>
+              </a:lnSpc>
+              <a:spcBef>
+                <a:spcPts val="500"/>
+              </a:spcBef>
+              <a:buFont typeface="Arial" panose="020B0604020202020204" pitchFamily="34" charset="0"/>
+              <a:buNone/>
+              <a:defRPr sz="1600" b="1" kern="1200">
+                <a:solidFill>
+                  <a:schemeClr val="tx1"/>
+                </a:solidFill>
+                <a:latin typeface="+mn-lt"/>
+                <a:ea typeface="+mn-ea"/>
+                <a:cs typeface="+mn-cs"/>
+              </a:defRPr>
+            </a:lvl6pPr>
+            <a:lvl7pPr marL="2743200" indent="0" algn="l" defTabSz="914400" rtl="0" eaLnBrk="1" latinLnBrk="0" hangingPunct="1">
+              <a:lnSpc>
+                <a:spcPct val="90000"/>
+              </a:lnSpc>
+              <a:spcBef>
+                <a:spcPts val="500"/>
+              </a:spcBef>
+              <a:buFont typeface="Arial" panose="020B0604020202020204" pitchFamily="34" charset="0"/>
+              <a:buNone/>
+              <a:defRPr sz="1600" b="1" kern="1200">
+                <a:solidFill>
+                  <a:schemeClr val="tx1"/>
+                </a:solidFill>
+                <a:latin typeface="+mn-lt"/>
+                <a:ea typeface="+mn-ea"/>
+                <a:cs typeface="+mn-cs"/>
+              </a:defRPr>
+            </a:lvl7pPr>
+            <a:lvl8pPr marL="3200400" indent="0" algn="l" defTabSz="914400" rtl="0" eaLnBrk="1" latinLnBrk="0" hangingPunct="1">
+              <a:lnSpc>
+                <a:spcPct val="90000"/>
+              </a:lnSpc>
+              <a:spcBef>
+                <a:spcPts val="500"/>
+              </a:spcBef>
+              <a:buFont typeface="Arial" panose="020B0604020202020204" pitchFamily="34" charset="0"/>
+              <a:buNone/>
+              <a:defRPr sz="1600" b="1" kern="1200">
+                <a:solidFill>
+                  <a:schemeClr val="tx1"/>
+                </a:solidFill>
+                <a:latin typeface="+mn-lt"/>
+                <a:ea typeface="+mn-ea"/>
+                <a:cs typeface="+mn-cs"/>
+              </a:defRPr>
+            </a:lvl8pPr>
+            <a:lvl9pPr marL="3657600" indent="0" algn="l" defTabSz="914400" rtl="0" eaLnBrk="1" latinLnBrk="0" hangingPunct="1">
+              <a:lnSpc>
+                <a:spcPct val="90000"/>
+              </a:lnSpc>
+              <a:spcBef>
+                <a:spcPts val="500"/>
+              </a:spcBef>
+              <a:buFont typeface="Arial" panose="020B0604020202020204" pitchFamily="34" charset="0"/>
+              <a:buNone/>
+              <a:defRPr sz="1600" b="1" kern="1200">
+                <a:solidFill>
+                  <a:schemeClr val="tx1"/>
+                </a:solidFill>
+                <a:latin typeface="+mn-lt"/>
+                <a:ea typeface="+mn-ea"/>
+                <a:cs typeface="+mn-cs"/>
+              </a:defRPr>
+            </a:lvl9pPr>
+          </a:lstStyle>
+          <a:p>
             <a:r>
               <a:rPr lang="de-DE" dirty="0"/>
-              <a:t> trade off </a:t>
-            </a:r>
-            <a:r>
-              <a:rPr lang="de-DE" dirty="0" err="1"/>
-              <a:t>between</a:t>
-            </a:r>
-            <a:r>
-              <a:rPr lang="de-DE" dirty="0"/>
-              <a:t> </a:t>
-            </a:r>
-            <a:r>
-              <a:rPr lang="de-DE" dirty="0" err="1"/>
-              <a:t>performance</a:t>
-            </a:r>
-            <a:r>
-              <a:rPr lang="de-DE" dirty="0"/>
-              <a:t> and </a:t>
-            </a:r>
-            <a:r>
-              <a:rPr lang="de-DE" dirty="0" err="1"/>
-              <a:t>interpretability</a:t>
-            </a:r>
-            <a:r>
-              <a:rPr lang="de-DE" dirty="0"/>
-              <a:t> </a:t>
-            </a:r>
-            <a:r>
-              <a:rPr lang="de-DE" dirty="0" err="1"/>
-              <a:t>of</a:t>
-            </a:r>
-            <a:r>
-              <a:rPr lang="de-DE" dirty="0"/>
-              <a:t> </a:t>
-            </a:r>
-            <a:r>
-              <a:rPr lang="de-DE" dirty="0" err="1"/>
-              <a:t>the</a:t>
-            </a:r>
-            <a:r>
-              <a:rPr lang="de-DE" dirty="0"/>
-              <a:t> </a:t>
-            </a:r>
-            <a:r>
-              <a:rPr lang="de-DE" dirty="0" err="1"/>
-              <a:t>models</a:t>
-            </a:r>
-            <a:endParaRPr lang="LID4096" dirty="0"/>
-          </a:p>
-        </p:txBody>
-      </p:sp>
-      <p:sp>
-        <p:nvSpPr>
-          <p:cNvPr id="5" name="Text Placeholder 4">
-            <a:extLst>
-              <a:ext uri="{FF2B5EF4-FFF2-40B4-BE49-F238E27FC236}">
-                <a16:creationId xmlns:a16="http://schemas.microsoft.com/office/drawing/2014/main" id="{31852C2E-9BDD-56A5-3733-853F5FFB78BA}"/>
-              </a:ext>
-            </a:extLst>
-          </p:cNvPr>
-          <p:cNvSpPr>
-            <a:spLocks noGrp="1"/>
-          </p:cNvSpPr>
-          <p:nvPr>
-            <p:ph type="body" sz="quarter" idx="3"/>
-          </p:nvPr>
-        </p:nvSpPr>
-        <p:spPr/>
-        <p:txBody>
-          <a:bodyPr/>
-          <a:lstStyle/>
-          <a:p>
-            <a:r>
-              <a:rPr lang="de-DE" dirty="0" err="1"/>
-              <a:t>Interpretability</a:t>
-            </a:r>
-            <a:endParaRPr lang="LID4096" dirty="0"/>
-          </a:p>
-        </p:txBody>
-      </p:sp>
-      <p:sp>
-        <p:nvSpPr>
-          <p:cNvPr id="6" name="Content Placeholder 5">
-            <a:extLst>
-              <a:ext uri="{FF2B5EF4-FFF2-40B4-BE49-F238E27FC236}">
-                <a16:creationId xmlns:a16="http://schemas.microsoft.com/office/drawing/2014/main" id="{7327A23F-BC1C-7964-BECE-762DAEE30EEC}"/>
-              </a:ext>
-            </a:extLst>
-          </p:cNvPr>
-          <p:cNvSpPr>
-            <a:spLocks noGrp="1"/>
-          </p:cNvSpPr>
-          <p:nvPr>
-            <p:ph sz="quarter" idx="4"/>
-          </p:nvPr>
-        </p:nvSpPr>
-        <p:spPr/>
-        <p:txBody>
-          <a:bodyPr/>
-          <a:lstStyle/>
-          <a:p>
-            <a:r>
-              <a:rPr lang="de-DE" dirty="0"/>
-              <a:t>Talk </a:t>
-            </a:r>
-            <a:r>
-              <a:rPr lang="de-DE" dirty="0" err="1"/>
-              <a:t>about</a:t>
-            </a:r>
-            <a:r>
-              <a:rPr lang="de-DE" dirty="0"/>
-              <a:t> trade off </a:t>
-            </a:r>
-            <a:r>
-              <a:rPr lang="de-DE" dirty="0" err="1"/>
-              <a:t>between</a:t>
-            </a:r>
-            <a:r>
-              <a:rPr lang="de-DE" dirty="0"/>
-              <a:t> </a:t>
-            </a:r>
-            <a:r>
-              <a:rPr lang="de-DE" dirty="0" err="1"/>
-              <a:t>performance</a:t>
-            </a:r>
-            <a:r>
-              <a:rPr lang="de-DE" dirty="0"/>
-              <a:t> and </a:t>
-            </a:r>
-            <a:r>
-              <a:rPr lang="de-DE" dirty="0" err="1"/>
-              <a:t>interpretability</a:t>
-            </a:r>
-            <a:r>
-              <a:rPr lang="de-DE" dirty="0"/>
-              <a:t> </a:t>
-            </a:r>
-            <a:r>
-              <a:rPr lang="de-DE" dirty="0" err="1"/>
-              <a:t>of</a:t>
-            </a:r>
-            <a:r>
-              <a:rPr lang="de-DE" dirty="0"/>
-              <a:t> </a:t>
-            </a:r>
-            <a:r>
-              <a:rPr lang="de-DE" dirty="0" err="1"/>
-              <a:t>the</a:t>
-            </a:r>
-            <a:r>
-              <a:rPr lang="de-DE" dirty="0"/>
-              <a:t> </a:t>
-            </a:r>
-            <a:r>
-              <a:rPr lang="de-DE" dirty="0" err="1"/>
-              <a:t>models</a:t>
-            </a:r>
-            <a:endParaRPr lang="LID4096" dirty="0"/>
-          </a:p>
-          <a:p>
+              <a:t>Regression</a:t>
+            </a:r>
             <a:endParaRPr lang="LID4096" dirty="0"/>
           </a:p>
         </p:txBody>
@@ -5168,7 +6136,7 @@
     </p:spTree>
     <p:extLst>
       <p:ext uri="{BB962C8B-B14F-4D97-AF65-F5344CB8AC3E}">
-        <p14:creationId xmlns:p14="http://schemas.microsoft.com/office/powerpoint/2010/main" val="2176239794"/>
+        <p14:creationId xmlns:p14="http://schemas.microsoft.com/office/powerpoint/2010/main" val="2104558610"/>
       </p:ext>
     </p:extLst>
   </p:cSld>
@@ -5200,127 +6168,6 @@
           <p:cNvPr id="2" name="Title 1">
             <a:extLst>
               <a:ext uri="{FF2B5EF4-FFF2-40B4-BE49-F238E27FC236}">
-                <a16:creationId xmlns:a16="http://schemas.microsoft.com/office/drawing/2014/main" id="{6235348D-2D83-7C7E-1DFD-207E0386385E}"/>
-              </a:ext>
-            </a:extLst>
-          </p:cNvPr>
-          <p:cNvSpPr>
-            <a:spLocks noGrp="1"/>
-          </p:cNvSpPr>
-          <p:nvPr>
-            <p:ph type="title"/>
-          </p:nvPr>
-        </p:nvSpPr>
-        <p:spPr/>
-        <p:txBody>
-          <a:bodyPr/>
-          <a:lstStyle/>
-          <a:p>
-            <a:r>
-              <a:rPr lang="de-DE" dirty="0" err="1"/>
-              <a:t>Analyzation</a:t>
-            </a:r>
-            <a:r>
-              <a:rPr lang="de-DE" dirty="0"/>
-              <a:t> &amp; </a:t>
-            </a:r>
-            <a:r>
-              <a:rPr lang="de-DE" dirty="0" err="1"/>
-              <a:t>justification</a:t>
-            </a:r>
-            <a:endParaRPr lang="LID4096" dirty="0"/>
-          </a:p>
-        </p:txBody>
-      </p:sp>
-      <p:sp>
-        <p:nvSpPr>
-          <p:cNvPr id="3" name="Content Placeholder 2">
-            <a:extLst>
-              <a:ext uri="{FF2B5EF4-FFF2-40B4-BE49-F238E27FC236}">
-                <a16:creationId xmlns:a16="http://schemas.microsoft.com/office/drawing/2014/main" id="{471DF4AF-E048-594C-C5C4-1E6470F69295}"/>
-              </a:ext>
-            </a:extLst>
-          </p:cNvPr>
-          <p:cNvSpPr>
-            <a:spLocks noGrp="1"/>
-          </p:cNvSpPr>
-          <p:nvPr>
-            <p:ph sz="half" idx="1"/>
-          </p:nvPr>
-        </p:nvSpPr>
-        <p:spPr/>
-        <p:txBody>
-          <a:bodyPr/>
-          <a:lstStyle/>
-          <a:p>
-            <a:r>
-              <a:rPr lang="en-US" dirty="0"/>
-              <a:t>Analyze and describe the reasons for selecting one of your implemented models as a best option for each task</a:t>
-            </a:r>
-            <a:endParaRPr lang="LID4096" dirty="0"/>
-          </a:p>
-        </p:txBody>
-      </p:sp>
-      <p:sp>
-        <p:nvSpPr>
-          <p:cNvPr id="4" name="Content Placeholder 3">
-            <a:extLst>
-              <a:ext uri="{FF2B5EF4-FFF2-40B4-BE49-F238E27FC236}">
-                <a16:creationId xmlns:a16="http://schemas.microsoft.com/office/drawing/2014/main" id="{FFA10BE0-E443-E1DB-6F12-574BFD9D1BF2}"/>
-              </a:ext>
-            </a:extLst>
-          </p:cNvPr>
-          <p:cNvSpPr>
-            <a:spLocks noGrp="1"/>
-          </p:cNvSpPr>
-          <p:nvPr>
-            <p:ph sz="half" idx="2"/>
-          </p:nvPr>
-        </p:nvSpPr>
-        <p:spPr/>
-        <p:txBody>
-          <a:bodyPr/>
-          <a:lstStyle/>
-          <a:p>
-            <a:endParaRPr lang="LID4096"/>
-          </a:p>
-        </p:txBody>
-      </p:sp>
-    </p:spTree>
-    <p:extLst>
-      <p:ext uri="{BB962C8B-B14F-4D97-AF65-F5344CB8AC3E}">
-        <p14:creationId xmlns:p14="http://schemas.microsoft.com/office/powerpoint/2010/main" val="2104558610"/>
-      </p:ext>
-    </p:extLst>
-  </p:cSld>
-  <p:clrMapOvr>
-    <a:masterClrMapping/>
-  </p:clrMapOvr>
-</p:sld>
-</file>
-
-<file path=ppt/slides/slide9.xml><?xml version="1.0" encoding="utf-8"?>
-<p:sld xmlns:a="http://schemas.openxmlformats.org/drawingml/2006/main" xmlns:r="http://schemas.openxmlformats.org/officeDocument/2006/relationships" xmlns:p="http://schemas.openxmlformats.org/presentationml/2006/main">
-  <p:cSld>
-    <p:spTree>
-      <p:nvGrpSpPr>
-        <p:cNvPr id="1" name=""/>
-        <p:cNvGrpSpPr/>
-        <p:nvPr/>
-      </p:nvGrpSpPr>
-      <p:grpSpPr>
-        <a:xfrm>
-          <a:off x="0" y="0"/>
-          <a:ext cx="0" cy="0"/>
-          <a:chOff x="0" y="0"/>
-          <a:chExt cx="0" cy="0"/>
-        </a:xfrm>
-      </p:grpSpPr>
-      <p:sp>
-        <p:nvSpPr>
-          <p:cNvPr id="2" name="Title 1">
-            <a:extLst>
-              <a:ext uri="{FF2B5EF4-FFF2-40B4-BE49-F238E27FC236}">
                 <a16:creationId xmlns:a16="http://schemas.microsoft.com/office/drawing/2014/main" id="{B40BA2FE-9395-A0F4-BAB0-19E6B5F1EB35}"/>
               </a:ext>
             </a:extLst>
@@ -5372,7 +6219,25 @@
           <a:p>
             <a:r>
               <a:rPr lang="en-US" dirty="0"/>
-              <a:t>The final analysis, reflection and conclusion on the proposed solutions.</a:t>
+              <a:t>Narrow difference between regression</a:t>
+            </a:r>
+          </a:p>
+          <a:p>
+            <a:endParaRPr lang="en-US" dirty="0"/>
+          </a:p>
+          <a:p>
+            <a:r>
+              <a:rPr lang="en-US" dirty="0"/>
+              <a:t>Classification: best, not good</a:t>
+            </a:r>
+          </a:p>
+          <a:p>
+            <a:endParaRPr lang="en-US" dirty="0"/>
+          </a:p>
+          <a:p>
+            <a:r>
+              <a:rPr lang="en-US" dirty="0"/>
+              <a:t>RHC clear winner in clustering</a:t>
             </a:r>
             <a:endParaRPr lang="LID4096" dirty="0"/>
           </a:p>
